--- a/xv6_part1.pptx
+++ b/xv6_part1.pptx
@@ -5,7 +5,7 @@
     <p:sldMasterId id="2147483648" r:id="rId1"/>
   </p:sldMasterIdLst>
   <p:notesMasterIdLst>
-    <p:notesMasterId r:id="rId14"/>
+    <p:notesMasterId r:id="rId20"/>
   </p:notesMasterIdLst>
   <p:sldIdLst>
     <p:sldId id="256" r:id="rId2"/>
@@ -19,7 +19,13 @@
     <p:sldId id="263" r:id="rId10"/>
     <p:sldId id="264" r:id="rId11"/>
     <p:sldId id="267" r:id="rId12"/>
-    <p:sldId id="265" r:id="rId13"/>
+    <p:sldId id="268" r:id="rId13"/>
+    <p:sldId id="273" r:id="rId14"/>
+    <p:sldId id="269" r:id="rId15"/>
+    <p:sldId id="270" r:id="rId16"/>
+    <p:sldId id="271" r:id="rId17"/>
+    <p:sldId id="272" r:id="rId18"/>
+    <p:sldId id="265" r:id="rId19"/>
   </p:sldIdLst>
   <p:sldSz cx="9144000" cy="5143500" type="screen16x9"/>
   <p:notesSz cx="5143500" cy="9144000"/>
@@ -505,6 +511,1014 @@
   <p:cSld>
     <p:spTree>
       <p:nvGrpSpPr>
+        <p:cNvPr id="1" name="">
+          <a:extLst>
+            <a:ext uri="{FF2B5EF4-FFF2-40B4-BE49-F238E27FC236}">
+              <a16:creationId xmlns:a16="http://schemas.microsoft.com/office/drawing/2014/main" id="{9145ACC0-A783-4739-E6DE-C4873B964D74}"/>
+            </a:ext>
+          </a:extLst>
+        </p:cNvPr>
+        <p:cNvGrpSpPr/>
+        <p:nvPr/>
+      </p:nvGrpSpPr>
+      <p:grpSpPr>
+        <a:xfrm>
+          <a:off x="0" y="0"/>
+          <a:ext cx="0" cy="0"/>
+          <a:chOff x="0" y="0"/>
+          <a:chExt cx="0" cy="0"/>
+        </a:xfrm>
+      </p:grpSpPr>
+      <p:sp>
+        <p:nvSpPr>
+          <p:cNvPr id="2" name="Slide Image Placeholder 1">
+            <a:extLst>
+              <a:ext uri="{FF2B5EF4-FFF2-40B4-BE49-F238E27FC236}">
+                <a16:creationId xmlns:a16="http://schemas.microsoft.com/office/drawing/2014/main" id="{0B35EAED-6665-D943-70A8-3B0512D3ADCC}"/>
+              </a:ext>
+            </a:extLst>
+          </p:cNvPr>
+          <p:cNvSpPr>
+            <a:spLocks noGrp="1" noRot="1" noChangeAspect="1"/>
+          </p:cNvSpPr>
+          <p:nvPr>
+            <p:ph type="sldImg"/>
+          </p:nvPr>
+        </p:nvSpPr>
+        <p:spPr/>
+      </p:sp>
+      <p:sp>
+        <p:nvSpPr>
+          <p:cNvPr id="3" name="Notes Placeholder 2">
+            <a:extLst>
+              <a:ext uri="{FF2B5EF4-FFF2-40B4-BE49-F238E27FC236}">
+                <a16:creationId xmlns:a16="http://schemas.microsoft.com/office/drawing/2014/main" id="{B150301E-2A80-ED20-16F8-749104C6F5FB}"/>
+              </a:ext>
+            </a:extLst>
+          </p:cNvPr>
+          <p:cNvSpPr>
+            <a:spLocks noGrp="1"/>
+          </p:cNvSpPr>
+          <p:nvPr>
+            <p:ph type="body" idx="1"/>
+          </p:nvPr>
+        </p:nvSpPr>
+        <p:spPr/>
+        <p:txBody>
+          <a:bodyPr/>
+          <a:lstStyle/>
+          <a:p>
+            <a:endParaRPr lang="en-US" dirty="0"/>
+          </a:p>
+        </p:txBody>
+      </p:sp>
+      <p:sp>
+        <p:nvSpPr>
+          <p:cNvPr id="4" name="Slide Number Placeholder 3">
+            <a:extLst>
+              <a:ext uri="{FF2B5EF4-FFF2-40B4-BE49-F238E27FC236}">
+                <a16:creationId xmlns:a16="http://schemas.microsoft.com/office/drawing/2014/main" id="{348C98F2-DC4B-AE9C-00C6-BDD4431B96D1}"/>
+              </a:ext>
+            </a:extLst>
+          </p:cNvPr>
+          <p:cNvSpPr>
+            <a:spLocks noGrp="1"/>
+          </p:cNvSpPr>
+          <p:nvPr>
+            <p:ph type="sldNum" sz="quarter" idx="10"/>
+          </p:nvPr>
+        </p:nvSpPr>
+        <p:spPr/>
+        <p:txBody>
+          <a:bodyPr/>
+          <a:lstStyle/>
+          <a:p>
+            <a:pPr marL="0" marR="0" lvl="0" indent="0" algn="l" defTabSz="914400" rtl="0" eaLnBrk="1" fontAlgn="auto" latinLnBrk="0" hangingPunct="1">
+              <a:lnSpc>
+                <a:spcPct val="100000"/>
+              </a:lnSpc>
+              <a:spcBef>
+                <a:spcPts val="0"/>
+              </a:spcBef>
+              <a:spcAft>
+                <a:spcPts val="0"/>
+              </a:spcAft>
+              <a:buClrTx/>
+              <a:buSzTx/>
+              <a:buFontTx/>
+              <a:buNone/>
+              <a:tabLst/>
+              <a:defRPr/>
+            </a:pPr>
+            <a:fld id="{F7021451-1387-4CA6-816F-3879F97B5CBC}" type="slidenum">
+              <a:rPr kumimoji="0" lang="en-US" sz="1800" b="0" i="0" u="none" strike="noStrike" kern="1200" cap="none" spc="0" normalizeH="0" baseline="0" noProof="0">
+                <a:ln>
+                  <a:noFill/>
+                </a:ln>
+                <a:solidFill>
+                  <a:prstClr val="black"/>
+                </a:solidFill>
+                <a:effectLst/>
+                <a:uLnTx/>
+                <a:uFillTx/>
+                <a:latin typeface="Calibri" panose="020F0502020204030204"/>
+                <a:ea typeface="+mn-ea"/>
+                <a:cs typeface="+mn-cs"/>
+              </a:rPr>
+              <a:pPr marL="0" marR="0" lvl="0" indent="0" algn="l" defTabSz="914400" rtl="0" eaLnBrk="1" fontAlgn="auto" latinLnBrk="0" hangingPunct="1">
+                <a:lnSpc>
+                  <a:spcPct val="100000"/>
+                </a:lnSpc>
+                <a:spcBef>
+                  <a:spcPts val="0"/>
+                </a:spcBef>
+                <a:spcAft>
+                  <a:spcPts val="0"/>
+                </a:spcAft>
+                <a:buClrTx/>
+                <a:buSzTx/>
+                <a:buFontTx/>
+                <a:buNone/>
+                <a:tabLst/>
+                <a:defRPr/>
+              </a:pPr>
+              <a:t>12</a:t>
+            </a:fld>
+            <a:endParaRPr kumimoji="0" lang="en-US" sz="1800" b="0" i="0" u="none" strike="noStrike" kern="1200" cap="none" spc="0" normalizeH="0" baseline="0" noProof="0">
+              <a:ln>
+                <a:noFill/>
+              </a:ln>
+              <a:solidFill>
+                <a:prstClr val="black"/>
+              </a:solidFill>
+              <a:effectLst/>
+              <a:uLnTx/>
+              <a:uFillTx/>
+              <a:latin typeface="Calibri" panose="020F0502020204030204"/>
+              <a:ea typeface="+mn-ea"/>
+              <a:cs typeface="+mn-cs"/>
+            </a:endParaRPr>
+          </a:p>
+        </p:txBody>
+      </p:sp>
+    </p:spTree>
+    <p:extLst>
+      <p:ext uri="{BB962C8B-B14F-4D97-AF65-F5344CB8AC3E}">
+        <p14:creationId xmlns:p14="http://schemas.microsoft.com/office/powerpoint/2010/main" val="1815299062"/>
+      </p:ext>
+    </p:extLst>
+  </p:cSld>
+  <p:clrMapOvr>
+    <a:masterClrMapping/>
+  </p:clrMapOvr>
+</p:notes>
+</file>
+
+<file path=ppt/notesSlides/notesSlide13.xml><?xml version="1.0" encoding="utf-8"?>
+<p:notes xmlns:a="http://schemas.openxmlformats.org/drawingml/2006/main" xmlns:r="http://schemas.openxmlformats.org/officeDocument/2006/relationships" xmlns:p="http://schemas.openxmlformats.org/presentationml/2006/main">
+  <p:cSld>
+    <p:spTree>
+      <p:nvGrpSpPr>
+        <p:cNvPr id="1" name="">
+          <a:extLst>
+            <a:ext uri="{FF2B5EF4-FFF2-40B4-BE49-F238E27FC236}">
+              <a16:creationId xmlns:a16="http://schemas.microsoft.com/office/drawing/2014/main" id="{B35E75E4-59F0-6996-C393-5C4730BDE9D4}"/>
+            </a:ext>
+          </a:extLst>
+        </p:cNvPr>
+        <p:cNvGrpSpPr/>
+        <p:nvPr/>
+      </p:nvGrpSpPr>
+      <p:grpSpPr>
+        <a:xfrm>
+          <a:off x="0" y="0"/>
+          <a:ext cx="0" cy="0"/>
+          <a:chOff x="0" y="0"/>
+          <a:chExt cx="0" cy="0"/>
+        </a:xfrm>
+      </p:grpSpPr>
+      <p:sp>
+        <p:nvSpPr>
+          <p:cNvPr id="2" name="Slide Image Placeholder 1">
+            <a:extLst>
+              <a:ext uri="{FF2B5EF4-FFF2-40B4-BE49-F238E27FC236}">
+                <a16:creationId xmlns:a16="http://schemas.microsoft.com/office/drawing/2014/main" id="{491692FB-9556-57A5-9C49-26F6E8189797}"/>
+              </a:ext>
+            </a:extLst>
+          </p:cNvPr>
+          <p:cNvSpPr>
+            <a:spLocks noGrp="1" noRot="1" noChangeAspect="1"/>
+          </p:cNvSpPr>
+          <p:nvPr>
+            <p:ph type="sldImg"/>
+          </p:nvPr>
+        </p:nvSpPr>
+        <p:spPr/>
+      </p:sp>
+      <p:sp>
+        <p:nvSpPr>
+          <p:cNvPr id="3" name="Notes Placeholder 2">
+            <a:extLst>
+              <a:ext uri="{FF2B5EF4-FFF2-40B4-BE49-F238E27FC236}">
+                <a16:creationId xmlns:a16="http://schemas.microsoft.com/office/drawing/2014/main" id="{B1773449-9EC7-CB9E-473A-D883CEC04DF8}"/>
+              </a:ext>
+            </a:extLst>
+          </p:cNvPr>
+          <p:cNvSpPr>
+            <a:spLocks noGrp="1"/>
+          </p:cNvSpPr>
+          <p:nvPr>
+            <p:ph type="body" idx="1"/>
+          </p:nvPr>
+        </p:nvSpPr>
+        <p:spPr/>
+        <p:txBody>
+          <a:bodyPr/>
+          <a:lstStyle/>
+          <a:p>
+            <a:endParaRPr lang="en-US" dirty="0"/>
+          </a:p>
+        </p:txBody>
+      </p:sp>
+      <p:sp>
+        <p:nvSpPr>
+          <p:cNvPr id="4" name="Slide Number Placeholder 3">
+            <a:extLst>
+              <a:ext uri="{FF2B5EF4-FFF2-40B4-BE49-F238E27FC236}">
+                <a16:creationId xmlns:a16="http://schemas.microsoft.com/office/drawing/2014/main" id="{109FED62-8738-E7ED-06F3-74B9385C6069}"/>
+              </a:ext>
+            </a:extLst>
+          </p:cNvPr>
+          <p:cNvSpPr>
+            <a:spLocks noGrp="1"/>
+          </p:cNvSpPr>
+          <p:nvPr>
+            <p:ph type="sldNum" sz="quarter" idx="10"/>
+          </p:nvPr>
+        </p:nvSpPr>
+        <p:spPr/>
+        <p:txBody>
+          <a:bodyPr/>
+          <a:lstStyle/>
+          <a:p>
+            <a:pPr marL="0" marR="0" lvl="0" indent="0" algn="l" defTabSz="914400" rtl="0" eaLnBrk="1" fontAlgn="auto" latinLnBrk="0" hangingPunct="1">
+              <a:lnSpc>
+                <a:spcPct val="100000"/>
+              </a:lnSpc>
+              <a:spcBef>
+                <a:spcPts val="0"/>
+              </a:spcBef>
+              <a:spcAft>
+                <a:spcPts val="0"/>
+              </a:spcAft>
+              <a:buClrTx/>
+              <a:buSzTx/>
+              <a:buFontTx/>
+              <a:buNone/>
+              <a:tabLst/>
+              <a:defRPr/>
+            </a:pPr>
+            <a:fld id="{F7021451-1387-4CA6-816F-3879F97B5CBC}" type="slidenum">
+              <a:rPr kumimoji="0" lang="en-US" sz="1800" b="0" i="0" u="none" strike="noStrike" kern="1200" cap="none" spc="0" normalizeH="0" baseline="0" noProof="0">
+                <a:ln>
+                  <a:noFill/>
+                </a:ln>
+                <a:solidFill>
+                  <a:prstClr val="black"/>
+                </a:solidFill>
+                <a:effectLst/>
+                <a:uLnTx/>
+                <a:uFillTx/>
+                <a:latin typeface="Calibri" panose="020F0502020204030204"/>
+                <a:ea typeface="+mn-ea"/>
+                <a:cs typeface="+mn-cs"/>
+              </a:rPr>
+              <a:pPr marL="0" marR="0" lvl="0" indent="0" algn="l" defTabSz="914400" rtl="0" eaLnBrk="1" fontAlgn="auto" latinLnBrk="0" hangingPunct="1">
+                <a:lnSpc>
+                  <a:spcPct val="100000"/>
+                </a:lnSpc>
+                <a:spcBef>
+                  <a:spcPts val="0"/>
+                </a:spcBef>
+                <a:spcAft>
+                  <a:spcPts val="0"/>
+                </a:spcAft>
+                <a:buClrTx/>
+                <a:buSzTx/>
+                <a:buFontTx/>
+                <a:buNone/>
+                <a:tabLst/>
+                <a:defRPr/>
+              </a:pPr>
+              <a:t>13</a:t>
+            </a:fld>
+            <a:endParaRPr kumimoji="0" lang="en-US" sz="1800" b="0" i="0" u="none" strike="noStrike" kern="1200" cap="none" spc="0" normalizeH="0" baseline="0" noProof="0">
+              <a:ln>
+                <a:noFill/>
+              </a:ln>
+              <a:solidFill>
+                <a:prstClr val="black"/>
+              </a:solidFill>
+              <a:effectLst/>
+              <a:uLnTx/>
+              <a:uFillTx/>
+              <a:latin typeface="Calibri" panose="020F0502020204030204"/>
+              <a:ea typeface="+mn-ea"/>
+              <a:cs typeface="+mn-cs"/>
+            </a:endParaRPr>
+          </a:p>
+        </p:txBody>
+      </p:sp>
+    </p:spTree>
+    <p:extLst>
+      <p:ext uri="{BB962C8B-B14F-4D97-AF65-F5344CB8AC3E}">
+        <p14:creationId xmlns:p14="http://schemas.microsoft.com/office/powerpoint/2010/main" val="1575955387"/>
+      </p:ext>
+    </p:extLst>
+  </p:cSld>
+  <p:clrMapOvr>
+    <a:masterClrMapping/>
+  </p:clrMapOvr>
+</p:notes>
+</file>
+
+<file path=ppt/notesSlides/notesSlide14.xml><?xml version="1.0" encoding="utf-8"?>
+<p:notes xmlns:a="http://schemas.openxmlformats.org/drawingml/2006/main" xmlns:r="http://schemas.openxmlformats.org/officeDocument/2006/relationships" xmlns:p="http://schemas.openxmlformats.org/presentationml/2006/main">
+  <p:cSld>
+    <p:spTree>
+      <p:nvGrpSpPr>
+        <p:cNvPr id="1" name="">
+          <a:extLst>
+            <a:ext uri="{FF2B5EF4-FFF2-40B4-BE49-F238E27FC236}">
+              <a16:creationId xmlns:a16="http://schemas.microsoft.com/office/drawing/2014/main" id="{2ED9B7D9-7C9A-F7C2-D64A-F96591ACAE76}"/>
+            </a:ext>
+          </a:extLst>
+        </p:cNvPr>
+        <p:cNvGrpSpPr/>
+        <p:nvPr/>
+      </p:nvGrpSpPr>
+      <p:grpSpPr>
+        <a:xfrm>
+          <a:off x="0" y="0"/>
+          <a:ext cx="0" cy="0"/>
+          <a:chOff x="0" y="0"/>
+          <a:chExt cx="0" cy="0"/>
+        </a:xfrm>
+      </p:grpSpPr>
+      <p:sp>
+        <p:nvSpPr>
+          <p:cNvPr id="2" name="Slide Image Placeholder 1">
+            <a:extLst>
+              <a:ext uri="{FF2B5EF4-FFF2-40B4-BE49-F238E27FC236}">
+                <a16:creationId xmlns:a16="http://schemas.microsoft.com/office/drawing/2014/main" id="{10782C2B-6D8E-B33B-97A6-7779EF5B575D}"/>
+              </a:ext>
+            </a:extLst>
+          </p:cNvPr>
+          <p:cNvSpPr>
+            <a:spLocks noGrp="1" noRot="1" noChangeAspect="1"/>
+          </p:cNvSpPr>
+          <p:nvPr>
+            <p:ph type="sldImg"/>
+          </p:nvPr>
+        </p:nvSpPr>
+        <p:spPr/>
+      </p:sp>
+      <p:sp>
+        <p:nvSpPr>
+          <p:cNvPr id="3" name="Notes Placeholder 2">
+            <a:extLst>
+              <a:ext uri="{FF2B5EF4-FFF2-40B4-BE49-F238E27FC236}">
+                <a16:creationId xmlns:a16="http://schemas.microsoft.com/office/drawing/2014/main" id="{C11E3A78-4E70-D0AF-23CB-A785924380A2}"/>
+              </a:ext>
+            </a:extLst>
+          </p:cNvPr>
+          <p:cNvSpPr>
+            <a:spLocks noGrp="1"/>
+          </p:cNvSpPr>
+          <p:nvPr>
+            <p:ph type="body" idx="1"/>
+          </p:nvPr>
+        </p:nvSpPr>
+        <p:spPr/>
+        <p:txBody>
+          <a:bodyPr/>
+          <a:lstStyle/>
+          <a:p>
+            <a:endParaRPr lang="en-US" dirty="0"/>
+          </a:p>
+        </p:txBody>
+      </p:sp>
+      <p:sp>
+        <p:nvSpPr>
+          <p:cNvPr id="4" name="Slide Number Placeholder 3">
+            <a:extLst>
+              <a:ext uri="{FF2B5EF4-FFF2-40B4-BE49-F238E27FC236}">
+                <a16:creationId xmlns:a16="http://schemas.microsoft.com/office/drawing/2014/main" id="{3A0DA8E0-05ED-E4E8-53E1-AEF3F09DCF77}"/>
+              </a:ext>
+            </a:extLst>
+          </p:cNvPr>
+          <p:cNvSpPr>
+            <a:spLocks noGrp="1"/>
+          </p:cNvSpPr>
+          <p:nvPr>
+            <p:ph type="sldNum" sz="quarter" idx="10"/>
+          </p:nvPr>
+        </p:nvSpPr>
+        <p:spPr/>
+        <p:txBody>
+          <a:bodyPr/>
+          <a:lstStyle/>
+          <a:p>
+            <a:pPr marL="0" marR="0" lvl="0" indent="0" algn="l" defTabSz="914400" rtl="0" eaLnBrk="1" fontAlgn="auto" latinLnBrk="0" hangingPunct="1">
+              <a:lnSpc>
+                <a:spcPct val="100000"/>
+              </a:lnSpc>
+              <a:spcBef>
+                <a:spcPts val="0"/>
+              </a:spcBef>
+              <a:spcAft>
+                <a:spcPts val="0"/>
+              </a:spcAft>
+              <a:buClrTx/>
+              <a:buSzTx/>
+              <a:buFontTx/>
+              <a:buNone/>
+              <a:tabLst/>
+              <a:defRPr/>
+            </a:pPr>
+            <a:fld id="{F7021451-1387-4CA6-816F-3879F97B5CBC}" type="slidenum">
+              <a:rPr kumimoji="0" lang="en-US" sz="1800" b="0" i="0" u="none" strike="noStrike" kern="1200" cap="none" spc="0" normalizeH="0" baseline="0" noProof="0">
+                <a:ln>
+                  <a:noFill/>
+                </a:ln>
+                <a:solidFill>
+                  <a:prstClr val="black"/>
+                </a:solidFill>
+                <a:effectLst/>
+                <a:uLnTx/>
+                <a:uFillTx/>
+                <a:latin typeface="Calibri" panose="020F0502020204030204"/>
+                <a:ea typeface="+mn-ea"/>
+                <a:cs typeface="+mn-cs"/>
+              </a:rPr>
+              <a:pPr marL="0" marR="0" lvl="0" indent="0" algn="l" defTabSz="914400" rtl="0" eaLnBrk="1" fontAlgn="auto" latinLnBrk="0" hangingPunct="1">
+                <a:lnSpc>
+                  <a:spcPct val="100000"/>
+                </a:lnSpc>
+                <a:spcBef>
+                  <a:spcPts val="0"/>
+                </a:spcBef>
+                <a:spcAft>
+                  <a:spcPts val="0"/>
+                </a:spcAft>
+                <a:buClrTx/>
+                <a:buSzTx/>
+                <a:buFontTx/>
+                <a:buNone/>
+                <a:tabLst/>
+                <a:defRPr/>
+              </a:pPr>
+              <a:t>14</a:t>
+            </a:fld>
+            <a:endParaRPr kumimoji="0" lang="en-US" sz="1800" b="0" i="0" u="none" strike="noStrike" kern="1200" cap="none" spc="0" normalizeH="0" baseline="0" noProof="0">
+              <a:ln>
+                <a:noFill/>
+              </a:ln>
+              <a:solidFill>
+                <a:prstClr val="black"/>
+              </a:solidFill>
+              <a:effectLst/>
+              <a:uLnTx/>
+              <a:uFillTx/>
+              <a:latin typeface="Calibri" panose="020F0502020204030204"/>
+              <a:ea typeface="+mn-ea"/>
+              <a:cs typeface="+mn-cs"/>
+            </a:endParaRPr>
+          </a:p>
+        </p:txBody>
+      </p:sp>
+    </p:spTree>
+    <p:extLst>
+      <p:ext uri="{BB962C8B-B14F-4D97-AF65-F5344CB8AC3E}">
+        <p14:creationId xmlns:p14="http://schemas.microsoft.com/office/powerpoint/2010/main" val="3672484460"/>
+      </p:ext>
+    </p:extLst>
+  </p:cSld>
+  <p:clrMapOvr>
+    <a:masterClrMapping/>
+  </p:clrMapOvr>
+</p:notes>
+</file>
+
+<file path=ppt/notesSlides/notesSlide15.xml><?xml version="1.0" encoding="utf-8"?>
+<p:notes xmlns:a="http://schemas.openxmlformats.org/drawingml/2006/main" xmlns:r="http://schemas.openxmlformats.org/officeDocument/2006/relationships" xmlns:p="http://schemas.openxmlformats.org/presentationml/2006/main">
+  <p:cSld>
+    <p:spTree>
+      <p:nvGrpSpPr>
+        <p:cNvPr id="1" name="">
+          <a:extLst>
+            <a:ext uri="{FF2B5EF4-FFF2-40B4-BE49-F238E27FC236}">
+              <a16:creationId xmlns:a16="http://schemas.microsoft.com/office/drawing/2014/main" id="{9E534C2F-8369-44E1-BE6A-6D5AD50BC46C}"/>
+            </a:ext>
+          </a:extLst>
+        </p:cNvPr>
+        <p:cNvGrpSpPr/>
+        <p:nvPr/>
+      </p:nvGrpSpPr>
+      <p:grpSpPr>
+        <a:xfrm>
+          <a:off x="0" y="0"/>
+          <a:ext cx="0" cy="0"/>
+          <a:chOff x="0" y="0"/>
+          <a:chExt cx="0" cy="0"/>
+        </a:xfrm>
+      </p:grpSpPr>
+      <p:sp>
+        <p:nvSpPr>
+          <p:cNvPr id="2" name="Slide Image Placeholder 1">
+            <a:extLst>
+              <a:ext uri="{FF2B5EF4-FFF2-40B4-BE49-F238E27FC236}">
+                <a16:creationId xmlns:a16="http://schemas.microsoft.com/office/drawing/2014/main" id="{43A56C79-7277-2629-5CD1-AC16219A1E9E}"/>
+              </a:ext>
+            </a:extLst>
+          </p:cNvPr>
+          <p:cNvSpPr>
+            <a:spLocks noGrp="1" noRot="1" noChangeAspect="1"/>
+          </p:cNvSpPr>
+          <p:nvPr>
+            <p:ph type="sldImg"/>
+          </p:nvPr>
+        </p:nvSpPr>
+        <p:spPr/>
+      </p:sp>
+      <p:sp>
+        <p:nvSpPr>
+          <p:cNvPr id="3" name="Notes Placeholder 2">
+            <a:extLst>
+              <a:ext uri="{FF2B5EF4-FFF2-40B4-BE49-F238E27FC236}">
+                <a16:creationId xmlns:a16="http://schemas.microsoft.com/office/drawing/2014/main" id="{CDECF890-ED23-439A-D728-C288CA0D2859}"/>
+              </a:ext>
+            </a:extLst>
+          </p:cNvPr>
+          <p:cNvSpPr>
+            <a:spLocks noGrp="1"/>
+          </p:cNvSpPr>
+          <p:nvPr>
+            <p:ph type="body" idx="1"/>
+          </p:nvPr>
+        </p:nvSpPr>
+        <p:spPr/>
+        <p:txBody>
+          <a:bodyPr/>
+          <a:lstStyle/>
+          <a:p>
+            <a:endParaRPr lang="en-US" dirty="0"/>
+          </a:p>
+        </p:txBody>
+      </p:sp>
+      <p:sp>
+        <p:nvSpPr>
+          <p:cNvPr id="4" name="Slide Number Placeholder 3">
+            <a:extLst>
+              <a:ext uri="{FF2B5EF4-FFF2-40B4-BE49-F238E27FC236}">
+                <a16:creationId xmlns:a16="http://schemas.microsoft.com/office/drawing/2014/main" id="{3E0D3E7F-7617-257F-65E4-EAC4DAE938EB}"/>
+              </a:ext>
+            </a:extLst>
+          </p:cNvPr>
+          <p:cNvSpPr>
+            <a:spLocks noGrp="1"/>
+          </p:cNvSpPr>
+          <p:nvPr>
+            <p:ph type="sldNum" sz="quarter" idx="10"/>
+          </p:nvPr>
+        </p:nvSpPr>
+        <p:spPr/>
+        <p:txBody>
+          <a:bodyPr/>
+          <a:lstStyle/>
+          <a:p>
+            <a:pPr marL="0" marR="0" lvl="0" indent="0" algn="l" defTabSz="914400" rtl="0" eaLnBrk="1" fontAlgn="auto" latinLnBrk="0" hangingPunct="1">
+              <a:lnSpc>
+                <a:spcPct val="100000"/>
+              </a:lnSpc>
+              <a:spcBef>
+                <a:spcPts val="0"/>
+              </a:spcBef>
+              <a:spcAft>
+                <a:spcPts val="0"/>
+              </a:spcAft>
+              <a:buClrTx/>
+              <a:buSzTx/>
+              <a:buFontTx/>
+              <a:buNone/>
+              <a:tabLst/>
+              <a:defRPr/>
+            </a:pPr>
+            <a:fld id="{F7021451-1387-4CA6-816F-3879F97B5CBC}" type="slidenum">
+              <a:rPr kumimoji="0" lang="en-US" sz="1800" b="0" i="0" u="none" strike="noStrike" kern="1200" cap="none" spc="0" normalizeH="0" baseline="0" noProof="0">
+                <a:ln>
+                  <a:noFill/>
+                </a:ln>
+                <a:solidFill>
+                  <a:prstClr val="black"/>
+                </a:solidFill>
+                <a:effectLst/>
+                <a:uLnTx/>
+                <a:uFillTx/>
+                <a:latin typeface="Calibri" panose="020F0502020204030204"/>
+                <a:ea typeface="+mn-ea"/>
+                <a:cs typeface="+mn-cs"/>
+              </a:rPr>
+              <a:pPr marL="0" marR="0" lvl="0" indent="0" algn="l" defTabSz="914400" rtl="0" eaLnBrk="1" fontAlgn="auto" latinLnBrk="0" hangingPunct="1">
+                <a:lnSpc>
+                  <a:spcPct val="100000"/>
+                </a:lnSpc>
+                <a:spcBef>
+                  <a:spcPts val="0"/>
+                </a:spcBef>
+                <a:spcAft>
+                  <a:spcPts val="0"/>
+                </a:spcAft>
+                <a:buClrTx/>
+                <a:buSzTx/>
+                <a:buFontTx/>
+                <a:buNone/>
+                <a:tabLst/>
+                <a:defRPr/>
+              </a:pPr>
+              <a:t>15</a:t>
+            </a:fld>
+            <a:endParaRPr kumimoji="0" lang="en-US" sz="1800" b="0" i="0" u="none" strike="noStrike" kern="1200" cap="none" spc="0" normalizeH="0" baseline="0" noProof="0">
+              <a:ln>
+                <a:noFill/>
+              </a:ln>
+              <a:solidFill>
+                <a:prstClr val="black"/>
+              </a:solidFill>
+              <a:effectLst/>
+              <a:uLnTx/>
+              <a:uFillTx/>
+              <a:latin typeface="Calibri" panose="020F0502020204030204"/>
+              <a:ea typeface="+mn-ea"/>
+              <a:cs typeface="+mn-cs"/>
+            </a:endParaRPr>
+          </a:p>
+        </p:txBody>
+      </p:sp>
+    </p:spTree>
+    <p:extLst>
+      <p:ext uri="{BB962C8B-B14F-4D97-AF65-F5344CB8AC3E}">
+        <p14:creationId xmlns:p14="http://schemas.microsoft.com/office/powerpoint/2010/main" val="2557322563"/>
+      </p:ext>
+    </p:extLst>
+  </p:cSld>
+  <p:clrMapOvr>
+    <a:masterClrMapping/>
+  </p:clrMapOvr>
+</p:notes>
+</file>
+
+<file path=ppt/notesSlides/notesSlide16.xml><?xml version="1.0" encoding="utf-8"?>
+<p:notes xmlns:a="http://schemas.openxmlformats.org/drawingml/2006/main" xmlns:r="http://schemas.openxmlformats.org/officeDocument/2006/relationships" xmlns:p="http://schemas.openxmlformats.org/presentationml/2006/main">
+  <p:cSld>
+    <p:spTree>
+      <p:nvGrpSpPr>
+        <p:cNvPr id="1" name="">
+          <a:extLst>
+            <a:ext uri="{FF2B5EF4-FFF2-40B4-BE49-F238E27FC236}">
+              <a16:creationId xmlns:a16="http://schemas.microsoft.com/office/drawing/2014/main" id="{01AF47FE-96C1-7336-1288-E4EDF5819CEF}"/>
+            </a:ext>
+          </a:extLst>
+        </p:cNvPr>
+        <p:cNvGrpSpPr/>
+        <p:nvPr/>
+      </p:nvGrpSpPr>
+      <p:grpSpPr>
+        <a:xfrm>
+          <a:off x="0" y="0"/>
+          <a:ext cx="0" cy="0"/>
+          <a:chOff x="0" y="0"/>
+          <a:chExt cx="0" cy="0"/>
+        </a:xfrm>
+      </p:grpSpPr>
+      <p:sp>
+        <p:nvSpPr>
+          <p:cNvPr id="2" name="Slide Image Placeholder 1">
+            <a:extLst>
+              <a:ext uri="{FF2B5EF4-FFF2-40B4-BE49-F238E27FC236}">
+                <a16:creationId xmlns:a16="http://schemas.microsoft.com/office/drawing/2014/main" id="{839C7EFF-D281-16BF-D311-47A70B706269}"/>
+              </a:ext>
+            </a:extLst>
+          </p:cNvPr>
+          <p:cNvSpPr>
+            <a:spLocks noGrp="1" noRot="1" noChangeAspect="1"/>
+          </p:cNvSpPr>
+          <p:nvPr>
+            <p:ph type="sldImg"/>
+          </p:nvPr>
+        </p:nvSpPr>
+        <p:spPr/>
+      </p:sp>
+      <p:sp>
+        <p:nvSpPr>
+          <p:cNvPr id="3" name="Notes Placeholder 2">
+            <a:extLst>
+              <a:ext uri="{FF2B5EF4-FFF2-40B4-BE49-F238E27FC236}">
+                <a16:creationId xmlns:a16="http://schemas.microsoft.com/office/drawing/2014/main" id="{55D60A64-ECC1-DA16-2EF2-631312113631}"/>
+              </a:ext>
+            </a:extLst>
+          </p:cNvPr>
+          <p:cNvSpPr>
+            <a:spLocks noGrp="1"/>
+          </p:cNvSpPr>
+          <p:nvPr>
+            <p:ph type="body" idx="1"/>
+          </p:nvPr>
+        </p:nvSpPr>
+        <p:spPr/>
+        <p:txBody>
+          <a:bodyPr/>
+          <a:lstStyle/>
+          <a:p>
+            <a:endParaRPr lang="en-US" dirty="0"/>
+          </a:p>
+        </p:txBody>
+      </p:sp>
+      <p:sp>
+        <p:nvSpPr>
+          <p:cNvPr id="4" name="Slide Number Placeholder 3">
+            <a:extLst>
+              <a:ext uri="{FF2B5EF4-FFF2-40B4-BE49-F238E27FC236}">
+                <a16:creationId xmlns:a16="http://schemas.microsoft.com/office/drawing/2014/main" id="{9F40CEA9-5104-DE2F-A00B-1BD7B98ACDE7}"/>
+              </a:ext>
+            </a:extLst>
+          </p:cNvPr>
+          <p:cNvSpPr>
+            <a:spLocks noGrp="1"/>
+          </p:cNvSpPr>
+          <p:nvPr>
+            <p:ph type="sldNum" sz="quarter" idx="10"/>
+          </p:nvPr>
+        </p:nvSpPr>
+        <p:spPr/>
+        <p:txBody>
+          <a:bodyPr/>
+          <a:lstStyle/>
+          <a:p>
+            <a:pPr marL="0" marR="0" lvl="0" indent="0" algn="l" defTabSz="914400" rtl="0" eaLnBrk="1" fontAlgn="auto" latinLnBrk="0" hangingPunct="1">
+              <a:lnSpc>
+                <a:spcPct val="100000"/>
+              </a:lnSpc>
+              <a:spcBef>
+                <a:spcPts val="0"/>
+              </a:spcBef>
+              <a:spcAft>
+                <a:spcPts val="0"/>
+              </a:spcAft>
+              <a:buClrTx/>
+              <a:buSzTx/>
+              <a:buFontTx/>
+              <a:buNone/>
+              <a:tabLst/>
+              <a:defRPr/>
+            </a:pPr>
+            <a:fld id="{F7021451-1387-4CA6-816F-3879F97B5CBC}" type="slidenum">
+              <a:rPr kumimoji="0" lang="en-US" sz="1800" b="0" i="0" u="none" strike="noStrike" kern="1200" cap="none" spc="0" normalizeH="0" baseline="0" noProof="0">
+                <a:ln>
+                  <a:noFill/>
+                </a:ln>
+                <a:solidFill>
+                  <a:prstClr val="black"/>
+                </a:solidFill>
+                <a:effectLst/>
+                <a:uLnTx/>
+                <a:uFillTx/>
+                <a:latin typeface="Calibri" panose="020F0502020204030204"/>
+                <a:ea typeface="+mn-ea"/>
+                <a:cs typeface="+mn-cs"/>
+              </a:rPr>
+              <a:pPr marL="0" marR="0" lvl="0" indent="0" algn="l" defTabSz="914400" rtl="0" eaLnBrk="1" fontAlgn="auto" latinLnBrk="0" hangingPunct="1">
+                <a:lnSpc>
+                  <a:spcPct val="100000"/>
+                </a:lnSpc>
+                <a:spcBef>
+                  <a:spcPts val="0"/>
+                </a:spcBef>
+                <a:spcAft>
+                  <a:spcPts val="0"/>
+                </a:spcAft>
+                <a:buClrTx/>
+                <a:buSzTx/>
+                <a:buFontTx/>
+                <a:buNone/>
+                <a:tabLst/>
+                <a:defRPr/>
+              </a:pPr>
+              <a:t>16</a:t>
+            </a:fld>
+            <a:endParaRPr kumimoji="0" lang="en-US" sz="1800" b="0" i="0" u="none" strike="noStrike" kern="1200" cap="none" spc="0" normalizeH="0" baseline="0" noProof="0">
+              <a:ln>
+                <a:noFill/>
+              </a:ln>
+              <a:solidFill>
+                <a:prstClr val="black"/>
+              </a:solidFill>
+              <a:effectLst/>
+              <a:uLnTx/>
+              <a:uFillTx/>
+              <a:latin typeface="Calibri" panose="020F0502020204030204"/>
+              <a:ea typeface="+mn-ea"/>
+              <a:cs typeface="+mn-cs"/>
+            </a:endParaRPr>
+          </a:p>
+        </p:txBody>
+      </p:sp>
+    </p:spTree>
+    <p:extLst>
+      <p:ext uri="{BB962C8B-B14F-4D97-AF65-F5344CB8AC3E}">
+        <p14:creationId xmlns:p14="http://schemas.microsoft.com/office/powerpoint/2010/main" val="3840537850"/>
+      </p:ext>
+    </p:extLst>
+  </p:cSld>
+  <p:clrMapOvr>
+    <a:masterClrMapping/>
+  </p:clrMapOvr>
+</p:notes>
+</file>
+
+<file path=ppt/notesSlides/notesSlide17.xml><?xml version="1.0" encoding="utf-8"?>
+<p:notes xmlns:a="http://schemas.openxmlformats.org/drawingml/2006/main" xmlns:r="http://schemas.openxmlformats.org/officeDocument/2006/relationships" xmlns:p="http://schemas.openxmlformats.org/presentationml/2006/main">
+  <p:cSld>
+    <p:spTree>
+      <p:nvGrpSpPr>
+        <p:cNvPr id="1" name="">
+          <a:extLst>
+            <a:ext uri="{FF2B5EF4-FFF2-40B4-BE49-F238E27FC236}">
+              <a16:creationId xmlns:a16="http://schemas.microsoft.com/office/drawing/2014/main" id="{5CB36E97-76BF-35C1-AE3D-4CF408A5B57E}"/>
+            </a:ext>
+          </a:extLst>
+        </p:cNvPr>
+        <p:cNvGrpSpPr/>
+        <p:nvPr/>
+      </p:nvGrpSpPr>
+      <p:grpSpPr>
+        <a:xfrm>
+          <a:off x="0" y="0"/>
+          <a:ext cx="0" cy="0"/>
+          <a:chOff x="0" y="0"/>
+          <a:chExt cx="0" cy="0"/>
+        </a:xfrm>
+      </p:grpSpPr>
+      <p:sp>
+        <p:nvSpPr>
+          <p:cNvPr id="2" name="Slide Image Placeholder 1">
+            <a:extLst>
+              <a:ext uri="{FF2B5EF4-FFF2-40B4-BE49-F238E27FC236}">
+                <a16:creationId xmlns:a16="http://schemas.microsoft.com/office/drawing/2014/main" id="{615745D0-7DF7-740F-13D3-050F2D8B3FED}"/>
+              </a:ext>
+            </a:extLst>
+          </p:cNvPr>
+          <p:cNvSpPr>
+            <a:spLocks noGrp="1" noRot="1" noChangeAspect="1"/>
+          </p:cNvSpPr>
+          <p:nvPr>
+            <p:ph type="sldImg"/>
+          </p:nvPr>
+        </p:nvSpPr>
+        <p:spPr/>
+      </p:sp>
+      <p:sp>
+        <p:nvSpPr>
+          <p:cNvPr id="3" name="Notes Placeholder 2">
+            <a:extLst>
+              <a:ext uri="{FF2B5EF4-FFF2-40B4-BE49-F238E27FC236}">
+                <a16:creationId xmlns:a16="http://schemas.microsoft.com/office/drawing/2014/main" id="{D6F5E303-DED9-7598-EBAA-8EDBDA73556A}"/>
+              </a:ext>
+            </a:extLst>
+          </p:cNvPr>
+          <p:cNvSpPr>
+            <a:spLocks noGrp="1"/>
+          </p:cNvSpPr>
+          <p:nvPr>
+            <p:ph type="body" idx="1"/>
+          </p:nvPr>
+        </p:nvSpPr>
+        <p:spPr/>
+        <p:txBody>
+          <a:bodyPr/>
+          <a:lstStyle/>
+          <a:p>
+            <a:endParaRPr lang="en-US" dirty="0"/>
+          </a:p>
+        </p:txBody>
+      </p:sp>
+      <p:sp>
+        <p:nvSpPr>
+          <p:cNvPr id="4" name="Slide Number Placeholder 3">
+            <a:extLst>
+              <a:ext uri="{FF2B5EF4-FFF2-40B4-BE49-F238E27FC236}">
+                <a16:creationId xmlns:a16="http://schemas.microsoft.com/office/drawing/2014/main" id="{76A8D0CA-843B-4878-802C-8355BB83EBE8}"/>
+              </a:ext>
+            </a:extLst>
+          </p:cNvPr>
+          <p:cNvSpPr>
+            <a:spLocks noGrp="1"/>
+          </p:cNvSpPr>
+          <p:nvPr>
+            <p:ph type="sldNum" sz="quarter" idx="10"/>
+          </p:nvPr>
+        </p:nvSpPr>
+        <p:spPr/>
+        <p:txBody>
+          <a:bodyPr/>
+          <a:lstStyle/>
+          <a:p>
+            <a:pPr marL="0" marR="0" lvl="0" indent="0" algn="l" defTabSz="914400" rtl="0" eaLnBrk="1" fontAlgn="auto" latinLnBrk="0" hangingPunct="1">
+              <a:lnSpc>
+                <a:spcPct val="100000"/>
+              </a:lnSpc>
+              <a:spcBef>
+                <a:spcPts val="0"/>
+              </a:spcBef>
+              <a:spcAft>
+                <a:spcPts val="0"/>
+              </a:spcAft>
+              <a:buClrTx/>
+              <a:buSzTx/>
+              <a:buFontTx/>
+              <a:buNone/>
+              <a:tabLst/>
+              <a:defRPr/>
+            </a:pPr>
+            <a:fld id="{F7021451-1387-4CA6-816F-3879F97B5CBC}" type="slidenum">
+              <a:rPr kumimoji="0" lang="en-US" sz="1800" b="0" i="0" u="none" strike="noStrike" kern="1200" cap="none" spc="0" normalizeH="0" baseline="0" noProof="0">
+                <a:ln>
+                  <a:noFill/>
+                </a:ln>
+                <a:solidFill>
+                  <a:prstClr val="black"/>
+                </a:solidFill>
+                <a:effectLst/>
+                <a:uLnTx/>
+                <a:uFillTx/>
+                <a:latin typeface="Calibri" panose="020F0502020204030204"/>
+                <a:ea typeface="+mn-ea"/>
+                <a:cs typeface="+mn-cs"/>
+              </a:rPr>
+              <a:pPr marL="0" marR="0" lvl="0" indent="0" algn="l" defTabSz="914400" rtl="0" eaLnBrk="1" fontAlgn="auto" latinLnBrk="0" hangingPunct="1">
+                <a:lnSpc>
+                  <a:spcPct val="100000"/>
+                </a:lnSpc>
+                <a:spcBef>
+                  <a:spcPts val="0"/>
+                </a:spcBef>
+                <a:spcAft>
+                  <a:spcPts val="0"/>
+                </a:spcAft>
+                <a:buClrTx/>
+                <a:buSzTx/>
+                <a:buFontTx/>
+                <a:buNone/>
+                <a:tabLst/>
+                <a:defRPr/>
+              </a:pPr>
+              <a:t>17</a:t>
+            </a:fld>
+            <a:endParaRPr kumimoji="0" lang="en-US" sz="1800" b="0" i="0" u="none" strike="noStrike" kern="1200" cap="none" spc="0" normalizeH="0" baseline="0" noProof="0">
+              <a:ln>
+                <a:noFill/>
+              </a:ln>
+              <a:solidFill>
+                <a:prstClr val="black"/>
+              </a:solidFill>
+              <a:effectLst/>
+              <a:uLnTx/>
+              <a:uFillTx/>
+              <a:latin typeface="Calibri" panose="020F0502020204030204"/>
+              <a:ea typeface="+mn-ea"/>
+              <a:cs typeface="+mn-cs"/>
+            </a:endParaRPr>
+          </a:p>
+        </p:txBody>
+      </p:sp>
+    </p:spTree>
+    <p:extLst>
+      <p:ext uri="{BB962C8B-B14F-4D97-AF65-F5344CB8AC3E}">
+        <p14:creationId xmlns:p14="http://schemas.microsoft.com/office/powerpoint/2010/main" val="3840518165"/>
+      </p:ext>
+    </p:extLst>
+  </p:cSld>
+  <p:clrMapOvr>
+    <a:masterClrMapping/>
+  </p:clrMapOvr>
+</p:notes>
+</file>
+
+<file path=ppt/notesSlides/notesSlide18.xml><?xml version="1.0" encoding="utf-8"?>
+<p:notes xmlns:a="http://schemas.openxmlformats.org/drawingml/2006/main" xmlns:r="http://schemas.openxmlformats.org/officeDocument/2006/relationships" xmlns:p="http://schemas.openxmlformats.org/presentationml/2006/main">
+  <p:cSld>
+    <p:spTree>
+      <p:nvGrpSpPr>
         <p:cNvPr id="1" name=""/>
         <p:cNvGrpSpPr/>
         <p:nvPr/>
@@ -565,7 +1579,7 @@
           <a:p>
             <a:fld id="{F7021451-1387-4CA6-816F-3879F97B5CBC}" type="slidenum">
               <a:rPr lang="en-US"/>
-              <a:t>12</a:t>
+              <a:t>18</a:t>
             </a:fld>
             <a:endParaRPr lang="en-US"/>
           </a:p>
@@ -1617,6 +2631,13 @@
             <a:prstDash val="solid"/>
           </a:ln>
         </p:spPr>
+        <p:txBody>
+          <a:bodyPr/>
+          <a:lstStyle/>
+          <a:p>
+            <a:endParaRPr lang="en-US"/>
+          </a:p>
+        </p:txBody>
       </p:sp>
       <p:sp>
         <p:nvSpPr>
@@ -1820,6 +2841,13 @@
             <a:prstDash val="solid"/>
           </a:ln>
         </p:spPr>
+        <p:txBody>
+          <a:bodyPr/>
+          <a:lstStyle/>
+          <a:p>
+            <a:endParaRPr lang="en-US"/>
+          </a:p>
+        </p:txBody>
       </p:sp>
       <p:sp>
         <p:nvSpPr>
@@ -1845,6 +2873,13 @@
             <a:prstDash val="solid"/>
           </a:ln>
         </p:spPr>
+        <p:txBody>
+          <a:bodyPr/>
+          <a:lstStyle/>
+          <a:p>
+            <a:endParaRPr lang="en-US"/>
+          </a:p>
+        </p:txBody>
       </p:sp>
       <p:sp>
         <p:nvSpPr>
@@ -1948,6 +2983,13 @@
             <a:prstDash val="solid"/>
           </a:ln>
         </p:spPr>
+        <p:txBody>
+          <a:bodyPr/>
+          <a:lstStyle/>
+          <a:p>
+            <a:endParaRPr lang="en-US"/>
+          </a:p>
+        </p:txBody>
       </p:sp>
       <p:sp>
         <p:nvSpPr>
@@ -2119,6 +3161,13 @@
             <a:prstDash val="solid"/>
           </a:ln>
         </p:spPr>
+        <p:txBody>
+          <a:bodyPr/>
+          <a:lstStyle/>
+          <a:p>
+            <a:endParaRPr lang="en-US"/>
+          </a:p>
+        </p:txBody>
       </p:sp>
       <p:sp>
         <p:nvSpPr>
@@ -2291,6 +3340,13 @@
             <a:prstDash val="solid"/>
           </a:ln>
         </p:spPr>
+        <p:txBody>
+          <a:bodyPr/>
+          <a:lstStyle/>
+          <a:p>
+            <a:endParaRPr lang="en-US"/>
+          </a:p>
+        </p:txBody>
       </p:sp>
       <p:sp>
         <p:nvSpPr>
@@ -2480,6 +3536,3409 @@
 
 <file path=ppt/slides/slide12.xml><?xml version="1.0" encoding="utf-8"?>
 <p:sld xmlns:a="http://schemas.openxmlformats.org/drawingml/2006/main" xmlns:r="http://schemas.openxmlformats.org/officeDocument/2006/relationships" xmlns:p="http://schemas.openxmlformats.org/presentationml/2006/main">
+  <p:cSld>
+    <p:bg>
+      <p:bgPr>
+        <a:solidFill>
+          <a:srgbClr val="1B2A4A"/>
+        </a:solidFill>
+        <a:effectLst/>
+      </p:bgPr>
+    </p:bg>
+    <p:spTree>
+      <p:nvGrpSpPr>
+        <p:cNvPr id="1" name="">
+          <a:extLst>
+            <a:ext uri="{FF2B5EF4-FFF2-40B4-BE49-F238E27FC236}">
+              <a16:creationId xmlns:a16="http://schemas.microsoft.com/office/drawing/2014/main" id="{88B7D20C-A789-40DB-38F0-22C5B001BC64}"/>
+            </a:ext>
+          </a:extLst>
+        </p:cNvPr>
+        <p:cNvGrpSpPr/>
+        <p:nvPr/>
+      </p:nvGrpSpPr>
+      <p:grpSpPr>
+        <a:xfrm>
+          <a:off x="0" y="0"/>
+          <a:ext cx="0" cy="0"/>
+          <a:chOff x="0" y="0"/>
+          <a:chExt cx="0" cy="0"/>
+        </a:xfrm>
+      </p:grpSpPr>
+      <p:sp>
+        <p:nvSpPr>
+          <p:cNvPr id="2" name="Shape 0">
+            <a:extLst>
+              <a:ext uri="{FF2B5EF4-FFF2-40B4-BE49-F238E27FC236}">
+                <a16:creationId xmlns:a16="http://schemas.microsoft.com/office/drawing/2014/main" id="{B5932E48-E518-43E1-2665-B6F18DA964CA}"/>
+              </a:ext>
+            </a:extLst>
+          </p:cNvPr>
+          <p:cNvSpPr/>
+          <p:nvPr/>
+        </p:nvSpPr>
+        <p:spPr>
+          <a:xfrm>
+            <a:off x="0" y="4114800"/>
+            <a:ext cx="9144000" cy="1028700"/>
+          </a:xfrm>
+          <a:prstGeom prst="rect">
+            <a:avLst/>
+          </a:prstGeom>
+          <a:solidFill>
+            <a:srgbClr val="0D9488"/>
+          </a:solidFill>
+          <a:ln w="12700">
+            <a:solidFill>
+              <a:srgbClr val="0D9488"/>
+            </a:solidFill>
+            <a:prstDash val="solid"/>
+          </a:ln>
+        </p:spPr>
+        <p:txBody>
+          <a:bodyPr/>
+          <a:lstStyle/>
+          <a:p>
+            <a:pPr marL="0" marR="0" lvl="0" indent="0" algn="l" defTabSz="914400" rtl="0" eaLnBrk="1" fontAlgn="auto" latinLnBrk="0" hangingPunct="1">
+              <a:lnSpc>
+                <a:spcPct val="100000"/>
+              </a:lnSpc>
+              <a:spcBef>
+                <a:spcPts val="0"/>
+              </a:spcBef>
+              <a:spcAft>
+                <a:spcPts val="0"/>
+              </a:spcAft>
+              <a:buClrTx/>
+              <a:buSzTx/>
+              <a:buFontTx/>
+              <a:buNone/>
+              <a:tabLst/>
+              <a:defRPr/>
+            </a:pPr>
+            <a:endParaRPr kumimoji="0" lang="en-US" sz="1800" b="0" i="0" u="none" strike="noStrike" kern="1200" cap="none" spc="0" normalizeH="0" baseline="0" noProof="0">
+              <a:ln>
+                <a:noFill/>
+              </a:ln>
+              <a:solidFill>
+                <a:prstClr val="black"/>
+              </a:solidFill>
+              <a:effectLst/>
+              <a:uLnTx/>
+              <a:uFillTx/>
+              <a:latin typeface="Calibri" panose="020F0502020204030204"/>
+              <a:ea typeface="+mn-ea"/>
+              <a:cs typeface="+mn-cs"/>
+            </a:endParaRPr>
+          </a:p>
+        </p:txBody>
+      </p:sp>
+      <p:sp>
+        <p:nvSpPr>
+          <p:cNvPr id="3" name="Text 1">
+            <a:extLst>
+              <a:ext uri="{FF2B5EF4-FFF2-40B4-BE49-F238E27FC236}">
+                <a16:creationId xmlns:a16="http://schemas.microsoft.com/office/drawing/2014/main" id="{E127769C-2662-018F-EDCA-A6E2E8723DC3}"/>
+              </a:ext>
+            </a:extLst>
+          </p:cNvPr>
+          <p:cNvSpPr/>
+          <p:nvPr/>
+        </p:nvSpPr>
+        <p:spPr>
+          <a:xfrm>
+            <a:off x="640080" y="1231260"/>
+            <a:ext cx="7863840" cy="640080"/>
+          </a:xfrm>
+          <a:prstGeom prst="rect">
+            <a:avLst/>
+          </a:prstGeom>
+          <a:noFill/>
+          <a:ln/>
+        </p:spPr>
+        <p:txBody>
+          <a:bodyPr wrap="square" rtlCol="0" anchor="ctr"/>
+          <a:lstStyle/>
+          <a:p>
+            <a:pPr marL="0" marR="0" lvl="0" indent="0" algn="l" defTabSz="914400" rtl="0" eaLnBrk="1" fontAlgn="auto" latinLnBrk="0" hangingPunct="1">
+              <a:lnSpc>
+                <a:spcPct val="100000"/>
+              </a:lnSpc>
+              <a:spcBef>
+                <a:spcPts val="0"/>
+              </a:spcBef>
+              <a:spcAft>
+                <a:spcPts val="0"/>
+              </a:spcAft>
+              <a:buClrTx/>
+              <a:buSzTx/>
+              <a:buFontTx/>
+              <a:buNone/>
+              <a:tabLst/>
+              <a:defRPr/>
+            </a:pPr>
+            <a:endParaRPr kumimoji="0" lang="en-US" sz="1400" b="0" i="0" u="none" strike="noStrike" kern="1200" cap="none" spc="0" normalizeH="0" baseline="0" noProof="0" dirty="0">
+              <a:ln>
+                <a:noFill/>
+              </a:ln>
+              <a:solidFill>
+                <a:prstClr val="black"/>
+              </a:solidFill>
+              <a:effectLst/>
+              <a:uLnTx/>
+              <a:uFillTx/>
+              <a:latin typeface="Calibri" panose="020F0502020204030204"/>
+              <a:ea typeface="+mn-ea"/>
+              <a:cs typeface="+mn-cs"/>
+            </a:endParaRPr>
+          </a:p>
+        </p:txBody>
+      </p:sp>
+      <p:sp>
+        <p:nvSpPr>
+          <p:cNvPr id="4" name="Text 2">
+            <a:extLst>
+              <a:ext uri="{FF2B5EF4-FFF2-40B4-BE49-F238E27FC236}">
+                <a16:creationId xmlns:a16="http://schemas.microsoft.com/office/drawing/2014/main" id="{9BB8D11B-7182-AE45-A651-7826A4DD3B6C}"/>
+              </a:ext>
+            </a:extLst>
+          </p:cNvPr>
+          <p:cNvSpPr/>
+          <p:nvPr/>
+        </p:nvSpPr>
+        <p:spPr>
+          <a:xfrm>
+            <a:off x="640080" y="1485900"/>
+            <a:ext cx="7863840" cy="1645920"/>
+          </a:xfrm>
+          <a:prstGeom prst="rect">
+            <a:avLst/>
+          </a:prstGeom>
+          <a:noFill/>
+          <a:ln/>
+        </p:spPr>
+        <p:txBody>
+          <a:bodyPr wrap="square" rtlCol="0" anchor="ctr"/>
+          <a:lstStyle/>
+          <a:p>
+            <a:pPr marL="0" marR="0" lvl="0" indent="0" algn="ctr" defTabSz="914400" rtl="0" eaLnBrk="1" fontAlgn="auto" latinLnBrk="0" hangingPunct="1">
+              <a:lnSpc>
+                <a:spcPct val="100000"/>
+              </a:lnSpc>
+              <a:spcBef>
+                <a:spcPts val="0"/>
+              </a:spcBef>
+              <a:spcAft>
+                <a:spcPts val="0"/>
+              </a:spcAft>
+              <a:buClrTx/>
+              <a:buSzTx/>
+              <a:buFontTx/>
+              <a:buNone/>
+              <a:tabLst/>
+              <a:defRPr/>
+            </a:pPr>
+            <a:r>
+              <a:rPr kumimoji="0" lang="en-US" sz="8800" b="1" i="0" u="none" strike="noStrike" kern="1200" cap="none" spc="0" normalizeH="0" baseline="0" noProof="0" dirty="0">
+                <a:ln>
+                  <a:noFill/>
+                </a:ln>
+                <a:solidFill>
+                  <a:srgbClr val="FFFFFF"/>
+                </a:solidFill>
+                <a:effectLst/>
+                <a:uLnTx/>
+                <a:uFillTx/>
+                <a:latin typeface="Calibri" pitchFamily="34" charset="0"/>
+                <a:ea typeface="Calibri" pitchFamily="34" charset="-122"/>
+                <a:cs typeface="Calibri" pitchFamily="34" charset="-120"/>
+              </a:rPr>
+              <a:t>Part 2</a:t>
+            </a:r>
+            <a:endParaRPr kumimoji="0" lang="en-US" sz="8800" b="0" i="0" u="none" strike="noStrike" kern="1200" cap="none" spc="0" normalizeH="0" baseline="0" noProof="0" dirty="0">
+              <a:ln>
+                <a:noFill/>
+              </a:ln>
+              <a:solidFill>
+                <a:prstClr val="black"/>
+              </a:solidFill>
+              <a:effectLst/>
+              <a:uLnTx/>
+              <a:uFillTx/>
+              <a:latin typeface="Calibri" panose="020F0502020204030204"/>
+              <a:ea typeface="+mn-ea"/>
+              <a:cs typeface="+mn-cs"/>
+            </a:endParaRPr>
+          </a:p>
+        </p:txBody>
+      </p:sp>
+      <p:sp>
+        <p:nvSpPr>
+          <p:cNvPr id="5" name="Text 3">
+            <a:extLst>
+              <a:ext uri="{FF2B5EF4-FFF2-40B4-BE49-F238E27FC236}">
+                <a16:creationId xmlns:a16="http://schemas.microsoft.com/office/drawing/2014/main" id="{76547FF3-77FC-D8C4-0C97-FBEC05BF30E8}"/>
+              </a:ext>
+            </a:extLst>
+          </p:cNvPr>
+          <p:cNvSpPr/>
+          <p:nvPr/>
+        </p:nvSpPr>
+        <p:spPr>
+          <a:xfrm>
+            <a:off x="640080" y="2834640"/>
+            <a:ext cx="7863840" cy="457200"/>
+          </a:xfrm>
+          <a:prstGeom prst="rect">
+            <a:avLst/>
+          </a:prstGeom>
+          <a:noFill/>
+          <a:ln/>
+        </p:spPr>
+        <p:txBody>
+          <a:bodyPr wrap="square" rtlCol="0" anchor="ctr"/>
+          <a:lstStyle/>
+          <a:p>
+            <a:pPr marL="0" marR="0" lvl="0" indent="0" algn="l" defTabSz="914400" rtl="0" eaLnBrk="1" fontAlgn="auto" latinLnBrk="0" hangingPunct="1">
+              <a:lnSpc>
+                <a:spcPct val="100000"/>
+              </a:lnSpc>
+              <a:spcBef>
+                <a:spcPts val="0"/>
+              </a:spcBef>
+              <a:spcAft>
+                <a:spcPts val="0"/>
+              </a:spcAft>
+              <a:buClrTx/>
+              <a:buSzTx/>
+              <a:buFontTx/>
+              <a:buNone/>
+              <a:tabLst/>
+              <a:defRPr/>
+            </a:pPr>
+            <a:endParaRPr kumimoji="0" lang="en-US" sz="1600" b="0" i="0" u="none" strike="noStrike" kern="1200" cap="none" spc="0" normalizeH="0" baseline="0" noProof="0" dirty="0">
+              <a:ln>
+                <a:noFill/>
+              </a:ln>
+              <a:solidFill>
+                <a:prstClr val="black"/>
+              </a:solidFill>
+              <a:effectLst/>
+              <a:uLnTx/>
+              <a:uFillTx/>
+              <a:latin typeface="Calibri" panose="020F0502020204030204"/>
+              <a:ea typeface="+mn-ea"/>
+              <a:cs typeface="+mn-cs"/>
+            </a:endParaRPr>
+          </a:p>
+        </p:txBody>
+      </p:sp>
+      <p:sp>
+        <p:nvSpPr>
+          <p:cNvPr id="6" name="Text 4">
+            <a:extLst>
+              <a:ext uri="{FF2B5EF4-FFF2-40B4-BE49-F238E27FC236}">
+                <a16:creationId xmlns:a16="http://schemas.microsoft.com/office/drawing/2014/main" id="{536E38B0-B47F-91D5-DF17-30DF28A83ADC}"/>
+              </a:ext>
+            </a:extLst>
+          </p:cNvPr>
+          <p:cNvSpPr/>
+          <p:nvPr/>
+        </p:nvSpPr>
+        <p:spPr>
+          <a:xfrm>
+            <a:off x="640080" y="4160520"/>
+            <a:ext cx="7863840" cy="457200"/>
+          </a:xfrm>
+          <a:prstGeom prst="rect">
+            <a:avLst/>
+          </a:prstGeom>
+          <a:noFill/>
+          <a:ln/>
+        </p:spPr>
+        <p:txBody>
+          <a:bodyPr wrap="square" rtlCol="0" anchor="ctr"/>
+          <a:lstStyle/>
+          <a:p>
+            <a:pPr marL="0" marR="0" lvl="0" indent="0" algn="l" defTabSz="914400" rtl="0" eaLnBrk="1" fontAlgn="auto" latinLnBrk="0" hangingPunct="1">
+              <a:lnSpc>
+                <a:spcPct val="100000"/>
+              </a:lnSpc>
+              <a:spcBef>
+                <a:spcPts val="0"/>
+              </a:spcBef>
+              <a:spcAft>
+                <a:spcPts val="0"/>
+              </a:spcAft>
+              <a:buClrTx/>
+              <a:buSzTx/>
+              <a:buFontTx/>
+              <a:buNone/>
+              <a:tabLst/>
+              <a:defRPr/>
+            </a:pPr>
+            <a:endParaRPr kumimoji="0" lang="en-US" sz="1300" b="0" i="0" u="none" strike="noStrike" kern="1200" cap="none" spc="0" normalizeH="0" baseline="0" noProof="0" dirty="0">
+              <a:ln>
+                <a:noFill/>
+              </a:ln>
+              <a:solidFill>
+                <a:prstClr val="black"/>
+              </a:solidFill>
+              <a:effectLst/>
+              <a:uLnTx/>
+              <a:uFillTx/>
+              <a:latin typeface="Calibri" panose="020F0502020204030204"/>
+              <a:ea typeface="+mn-ea"/>
+              <a:cs typeface="+mn-cs"/>
+            </a:endParaRPr>
+          </a:p>
+        </p:txBody>
+      </p:sp>
+    </p:spTree>
+    <p:extLst>
+      <p:ext uri="{BB962C8B-B14F-4D97-AF65-F5344CB8AC3E}">
+        <p14:creationId xmlns:p14="http://schemas.microsoft.com/office/powerpoint/2010/main" val="4271916452"/>
+      </p:ext>
+    </p:extLst>
+  </p:cSld>
+  <p:clrMapOvr>
+    <a:masterClrMapping/>
+  </p:clrMapOvr>
+</p:sld>
+</file>
+
+<file path=ppt/slides/slide13.xml><?xml version="1.0" encoding="utf-8"?>
+<p:sld xmlns:a="http://schemas.openxmlformats.org/drawingml/2006/main" xmlns:r="http://schemas.openxmlformats.org/officeDocument/2006/relationships" xmlns:p="http://schemas.openxmlformats.org/presentationml/2006/main">
+  <p:cSld>
+    <p:bg>
+      <p:bgPr>
+        <a:solidFill>
+          <a:srgbClr val="FFFFFF"/>
+        </a:solidFill>
+        <a:effectLst/>
+      </p:bgPr>
+    </p:bg>
+    <p:spTree>
+      <p:nvGrpSpPr>
+        <p:cNvPr id="1" name="">
+          <a:extLst>
+            <a:ext uri="{FF2B5EF4-FFF2-40B4-BE49-F238E27FC236}">
+              <a16:creationId xmlns:a16="http://schemas.microsoft.com/office/drawing/2014/main" id="{909535AE-46CF-F8F8-0DE4-483218D1A516}"/>
+            </a:ext>
+          </a:extLst>
+        </p:cNvPr>
+        <p:cNvGrpSpPr/>
+        <p:nvPr/>
+      </p:nvGrpSpPr>
+      <p:grpSpPr>
+        <a:xfrm>
+          <a:off x="0" y="0"/>
+          <a:ext cx="0" cy="0"/>
+          <a:chOff x="0" y="0"/>
+          <a:chExt cx="0" cy="0"/>
+        </a:xfrm>
+      </p:grpSpPr>
+      <p:sp>
+        <p:nvSpPr>
+          <p:cNvPr id="2" name="Shape 0">
+            <a:extLst>
+              <a:ext uri="{FF2B5EF4-FFF2-40B4-BE49-F238E27FC236}">
+                <a16:creationId xmlns:a16="http://schemas.microsoft.com/office/drawing/2014/main" id="{B3D8F6D6-4129-C462-CF1E-E5022FB7B926}"/>
+              </a:ext>
+            </a:extLst>
+          </p:cNvPr>
+          <p:cNvSpPr/>
+          <p:nvPr/>
+        </p:nvSpPr>
+        <p:spPr>
+          <a:xfrm>
+            <a:off x="0" y="0"/>
+            <a:ext cx="164592" cy="5143500"/>
+          </a:xfrm>
+          <a:prstGeom prst="rect">
+            <a:avLst/>
+          </a:prstGeom>
+          <a:solidFill>
+            <a:srgbClr val="1B2A4A"/>
+          </a:solidFill>
+          <a:ln w="12700">
+            <a:solidFill>
+              <a:srgbClr val="1B2A4A"/>
+            </a:solidFill>
+            <a:prstDash val="solid"/>
+          </a:ln>
+        </p:spPr>
+        <p:txBody>
+          <a:bodyPr/>
+          <a:lstStyle/>
+          <a:p>
+            <a:pPr marL="0" marR="0" lvl="0" indent="0" algn="l" defTabSz="914400" rtl="0" eaLnBrk="1" fontAlgn="auto" latinLnBrk="0" hangingPunct="1">
+              <a:lnSpc>
+                <a:spcPct val="100000"/>
+              </a:lnSpc>
+              <a:spcBef>
+                <a:spcPts val="0"/>
+              </a:spcBef>
+              <a:spcAft>
+                <a:spcPts val="0"/>
+              </a:spcAft>
+              <a:buClrTx/>
+              <a:buSzTx/>
+              <a:buFontTx/>
+              <a:buNone/>
+              <a:tabLst/>
+              <a:defRPr/>
+            </a:pPr>
+            <a:endParaRPr kumimoji="0" lang="en-US" sz="1800" b="0" i="0" u="none" strike="noStrike" kern="1200" cap="none" spc="0" normalizeH="0" baseline="0" noProof="0">
+              <a:ln>
+                <a:noFill/>
+              </a:ln>
+              <a:solidFill>
+                <a:prstClr val="black"/>
+              </a:solidFill>
+              <a:effectLst/>
+              <a:uLnTx/>
+              <a:uFillTx/>
+              <a:latin typeface="Calibri" panose="020F0502020204030204"/>
+              <a:ea typeface="+mn-ea"/>
+              <a:cs typeface="+mn-cs"/>
+            </a:endParaRPr>
+          </a:p>
+        </p:txBody>
+      </p:sp>
+      <p:sp>
+        <p:nvSpPr>
+          <p:cNvPr id="3" name="Shape 1">
+            <a:extLst>
+              <a:ext uri="{FF2B5EF4-FFF2-40B4-BE49-F238E27FC236}">
+                <a16:creationId xmlns:a16="http://schemas.microsoft.com/office/drawing/2014/main" id="{34DF340C-E97B-64AE-E1A8-96707BC06731}"/>
+              </a:ext>
+            </a:extLst>
+          </p:cNvPr>
+          <p:cNvSpPr/>
+          <p:nvPr/>
+        </p:nvSpPr>
+        <p:spPr>
+          <a:xfrm>
+            <a:off x="164592" y="0"/>
+            <a:ext cx="8979408" cy="713232"/>
+          </a:xfrm>
+          <a:prstGeom prst="rect">
+            <a:avLst/>
+          </a:prstGeom>
+          <a:solidFill>
+            <a:srgbClr val="F4F6FA"/>
+          </a:solidFill>
+          <a:ln w="12700">
+            <a:solidFill>
+              <a:srgbClr val="F4F6FA"/>
+            </a:solidFill>
+            <a:prstDash val="solid"/>
+          </a:ln>
+        </p:spPr>
+        <p:txBody>
+          <a:bodyPr/>
+          <a:lstStyle/>
+          <a:p>
+            <a:pPr marL="0" marR="0" lvl="0" indent="0" algn="l" defTabSz="914400" rtl="0" eaLnBrk="1" fontAlgn="auto" latinLnBrk="0" hangingPunct="1">
+              <a:lnSpc>
+                <a:spcPct val="100000"/>
+              </a:lnSpc>
+              <a:spcBef>
+                <a:spcPts val="0"/>
+              </a:spcBef>
+              <a:spcAft>
+                <a:spcPts val="0"/>
+              </a:spcAft>
+              <a:buClrTx/>
+              <a:buSzTx/>
+              <a:buFontTx/>
+              <a:buNone/>
+              <a:tabLst/>
+              <a:defRPr/>
+            </a:pPr>
+            <a:endParaRPr kumimoji="0" lang="en-US" sz="1800" b="0" i="0" u="none" strike="noStrike" kern="1200" cap="none" spc="0" normalizeH="0" baseline="0" noProof="0">
+              <a:ln>
+                <a:noFill/>
+              </a:ln>
+              <a:solidFill>
+                <a:prstClr val="black"/>
+              </a:solidFill>
+              <a:effectLst/>
+              <a:uLnTx/>
+              <a:uFillTx/>
+              <a:latin typeface="Calibri" panose="020F0502020204030204"/>
+              <a:ea typeface="+mn-ea"/>
+              <a:cs typeface="+mn-cs"/>
+            </a:endParaRPr>
+          </a:p>
+        </p:txBody>
+      </p:sp>
+      <p:sp>
+        <p:nvSpPr>
+          <p:cNvPr id="4" name="Text 2">
+            <a:extLst>
+              <a:ext uri="{FF2B5EF4-FFF2-40B4-BE49-F238E27FC236}">
+                <a16:creationId xmlns:a16="http://schemas.microsoft.com/office/drawing/2014/main" id="{BDAD75FC-5B5C-EE16-F335-6A5BADDE20E6}"/>
+              </a:ext>
+            </a:extLst>
+          </p:cNvPr>
+          <p:cNvSpPr/>
+          <p:nvPr/>
+        </p:nvSpPr>
+        <p:spPr>
+          <a:xfrm>
+            <a:off x="347472" y="0"/>
+            <a:ext cx="8595360" cy="713232"/>
+          </a:xfrm>
+          <a:prstGeom prst="rect">
+            <a:avLst/>
+          </a:prstGeom>
+          <a:noFill/>
+          <a:ln/>
+        </p:spPr>
+        <p:txBody>
+          <a:bodyPr wrap="square" lIns="0" tIns="0" rIns="0" bIns="0" rtlCol="0" anchor="ctr"/>
+          <a:lstStyle/>
+          <a:p>
+            <a:pPr marL="0" marR="0" lvl="0" indent="0" algn="l" defTabSz="914400" rtl="0" eaLnBrk="1" fontAlgn="auto" latinLnBrk="0" hangingPunct="1">
+              <a:lnSpc>
+                <a:spcPct val="100000"/>
+              </a:lnSpc>
+              <a:spcBef>
+                <a:spcPts val="0"/>
+              </a:spcBef>
+              <a:spcAft>
+                <a:spcPts val="0"/>
+              </a:spcAft>
+              <a:buClrTx/>
+              <a:buSzTx/>
+              <a:buFontTx/>
+              <a:buNone/>
+              <a:tabLst/>
+              <a:defRPr/>
+            </a:pPr>
+            <a:r>
+              <a:rPr kumimoji="0" lang="en-US" sz="2200" b="1" i="0" u="none" strike="noStrike" kern="1200" cap="none" spc="0" normalizeH="0" baseline="0" noProof="0" dirty="0">
+                <a:ln>
+                  <a:noFill/>
+                </a:ln>
+                <a:solidFill>
+                  <a:srgbClr val="1B2A4A"/>
+                </a:solidFill>
+                <a:effectLst/>
+                <a:uLnTx/>
+                <a:uFillTx/>
+                <a:latin typeface="Calibri" pitchFamily="34" charset="0"/>
+                <a:ea typeface="Calibri" pitchFamily="34" charset="-122"/>
+                <a:cs typeface="Calibri" pitchFamily="34" charset="-120"/>
+              </a:rPr>
+              <a:t>xv6 Files Modified &amp; Added</a:t>
+            </a:r>
+            <a:endParaRPr kumimoji="0" lang="en-US" sz="2200" b="0" i="0" u="none" strike="noStrike" kern="1200" cap="none" spc="0" normalizeH="0" baseline="0" noProof="0" dirty="0">
+              <a:ln>
+                <a:noFill/>
+              </a:ln>
+              <a:solidFill>
+                <a:prstClr val="black"/>
+              </a:solidFill>
+              <a:effectLst/>
+              <a:uLnTx/>
+              <a:uFillTx/>
+              <a:latin typeface="Calibri" panose="020F0502020204030204"/>
+              <a:ea typeface="+mn-ea"/>
+              <a:cs typeface="+mn-cs"/>
+            </a:endParaRPr>
+          </a:p>
+        </p:txBody>
+      </p:sp>
+      <p:graphicFrame>
+        <p:nvGraphicFramePr>
+          <p:cNvPr id="5" name="Table 0">
+            <a:extLst>
+              <a:ext uri="{FF2B5EF4-FFF2-40B4-BE49-F238E27FC236}">
+                <a16:creationId xmlns:a16="http://schemas.microsoft.com/office/drawing/2014/main" id="{30872B0C-9C2A-2E08-75CD-3D640071E624}"/>
+              </a:ext>
+            </a:extLst>
+          </p:cNvPr>
+          <p:cNvGraphicFramePr>
+            <a:graphicFrameLocks noGrp="1"/>
+          </p:cNvGraphicFramePr>
+          <p:nvPr>
+            <p:extLst>
+              <p:ext uri="{D42A27DB-BD31-4B8C-83A1-F6EECF244321}">
+                <p14:modId xmlns:p14="http://schemas.microsoft.com/office/powerpoint/2010/main" val="11425781"/>
+              </p:ext>
+            </p:extLst>
+          </p:nvPr>
+        </p:nvGraphicFramePr>
+        <p:xfrm>
+          <a:off x="700495" y="1051560"/>
+          <a:ext cx="7743009" cy="3311434"/>
+        </p:xfrm>
+        <a:graphic>
+          <a:graphicData uri="http://schemas.openxmlformats.org/drawingml/2006/table">
+            <a:tbl>
+              <a:tblPr/>
+              <a:tblGrid>
+                <a:gridCol w="3860892">
+                  <a:extLst>
+                    <a:ext uri="{9D8B030D-6E8A-4147-A177-3AD203B41FA5}">
+                      <a16:colId xmlns:a16="http://schemas.microsoft.com/office/drawing/2014/main" val="20000"/>
+                    </a:ext>
+                  </a:extLst>
+                </a:gridCol>
+                <a:gridCol w="3882117">
+                  <a:extLst>
+                    <a:ext uri="{9D8B030D-6E8A-4147-A177-3AD203B41FA5}">
+                      <a16:colId xmlns:a16="http://schemas.microsoft.com/office/drawing/2014/main" val="20001"/>
+                    </a:ext>
+                  </a:extLst>
+                </a:gridCol>
+              </a:tblGrid>
+              <a:tr h="662736">
+                <a:tc>
+                  <a:txBody>
+                    <a:bodyPr/>
+                    <a:lstStyle/>
+                    <a:p>
+                      <a:pPr marL="0" indent="0" algn="ctr">
+                        <a:buNone/>
+                      </a:pPr>
+                      <a:r>
+                        <a:rPr lang="en-US" sz="2000" b="1" dirty="0">
+                          <a:solidFill>
+                            <a:srgbClr val="FFFFFF"/>
+                          </a:solidFill>
+                          <a:latin typeface="Calibri" pitchFamily="34" charset="0"/>
+                          <a:ea typeface="Calibri" pitchFamily="34" charset="-122"/>
+                          <a:cs typeface="Calibri" pitchFamily="34" charset="-120"/>
+                        </a:rPr>
+                        <a:t>Implementation</a:t>
+                      </a:r>
+                      <a:endParaRPr lang="en-US" sz="2000" dirty="0">
+                        <a:latin typeface="Calibri" charset="0"/>
+                        <a:ea typeface="Calibri" charset="0"/>
+                        <a:cs typeface="Calibri" charset="0"/>
+                      </a:endParaRPr>
+                    </a:p>
+                  </a:txBody>
+                  <a:tcPr anchor="ctr">
+                    <a:lnL w="6350" cap="flat" cmpd="sng" algn="ctr">
+                      <a:solidFill>
+                        <a:srgbClr val="E5E7EB"/>
+                      </a:solidFill>
+                      <a:prstDash val="solid"/>
+                      <a:round/>
+                      <a:headEnd type="none" w="med" len="med"/>
+                      <a:tailEnd type="none" w="med" len="med"/>
+                    </a:lnL>
+                    <a:lnR w="6350" cap="flat" cmpd="sng" algn="ctr">
+                      <a:solidFill>
+                        <a:srgbClr val="E5E7EB"/>
+                      </a:solidFill>
+                      <a:prstDash val="solid"/>
+                      <a:round/>
+                      <a:headEnd type="none" w="med" len="med"/>
+                      <a:tailEnd type="none" w="med" len="med"/>
+                    </a:lnR>
+                    <a:lnT w="6350" cap="flat" cmpd="sng" algn="ctr">
+                      <a:solidFill>
+                        <a:srgbClr val="E5E7EB"/>
+                      </a:solidFill>
+                      <a:prstDash val="solid"/>
+                      <a:round/>
+                      <a:headEnd type="none" w="med" len="med"/>
+                      <a:tailEnd type="none" w="med" len="med"/>
+                    </a:lnT>
+                    <a:lnB w="6350" cap="flat" cmpd="sng" algn="ctr">
+                      <a:solidFill>
+                        <a:srgbClr val="E5E7EB"/>
+                      </a:solidFill>
+                      <a:prstDash val="solid"/>
+                      <a:round/>
+                      <a:headEnd type="none" w="med" len="med"/>
+                      <a:tailEnd type="none" w="med" len="med"/>
+                    </a:lnB>
+                    <a:solidFill>
+                      <a:srgbClr val="1B2A4A"/>
+                    </a:solidFill>
+                  </a:tcPr>
+                </a:tc>
+                <a:tc>
+                  <a:txBody>
+                    <a:bodyPr/>
+                    <a:lstStyle/>
+                    <a:p>
+                      <a:pPr marL="0" indent="0" algn="ctr">
+                        <a:buNone/>
+                      </a:pPr>
+                      <a:r>
+                        <a:rPr lang="en-US" sz="2000" b="1" dirty="0">
+                          <a:solidFill>
+                            <a:srgbClr val="FFFFFF"/>
+                          </a:solidFill>
+                          <a:latin typeface="Calibri" pitchFamily="34" charset="0"/>
+                          <a:ea typeface="Calibri" pitchFamily="34" charset="-122"/>
+                          <a:cs typeface="Calibri" pitchFamily="34" charset="-120"/>
+                        </a:rPr>
+                        <a:t>Testing</a:t>
+                      </a:r>
+                      <a:endParaRPr lang="en-US" sz="2000" dirty="0">
+                        <a:latin typeface="Calibri" charset="0"/>
+                        <a:ea typeface="Calibri" charset="0"/>
+                        <a:cs typeface="Calibri" charset="0"/>
+                      </a:endParaRPr>
+                    </a:p>
+                  </a:txBody>
+                  <a:tcPr anchor="ctr">
+                    <a:lnL w="6350" cap="flat" cmpd="sng" algn="ctr">
+                      <a:solidFill>
+                        <a:srgbClr val="E5E7EB"/>
+                      </a:solidFill>
+                      <a:prstDash val="solid"/>
+                      <a:round/>
+                      <a:headEnd type="none" w="med" len="med"/>
+                      <a:tailEnd type="none" w="med" len="med"/>
+                    </a:lnL>
+                    <a:lnR w="6350" cap="flat" cmpd="sng" algn="ctr">
+                      <a:solidFill>
+                        <a:srgbClr val="E5E7EB"/>
+                      </a:solidFill>
+                      <a:prstDash val="solid"/>
+                      <a:round/>
+                      <a:headEnd type="none" w="med" len="med"/>
+                      <a:tailEnd type="none" w="med" len="med"/>
+                    </a:lnR>
+                    <a:lnT w="6350" cap="flat" cmpd="sng" algn="ctr">
+                      <a:solidFill>
+                        <a:srgbClr val="E5E7EB"/>
+                      </a:solidFill>
+                      <a:prstDash val="solid"/>
+                      <a:round/>
+                      <a:headEnd type="none" w="med" len="med"/>
+                      <a:tailEnd type="none" w="med" len="med"/>
+                    </a:lnT>
+                    <a:lnB w="6350" cap="flat" cmpd="sng" algn="ctr">
+                      <a:solidFill>
+                        <a:srgbClr val="E5E7EB"/>
+                      </a:solidFill>
+                      <a:prstDash val="solid"/>
+                      <a:round/>
+                      <a:headEnd type="none" w="med" len="med"/>
+                      <a:tailEnd type="none" w="med" len="med"/>
+                    </a:lnB>
+                    <a:solidFill>
+                      <a:srgbClr val="1B2A4A"/>
+                    </a:solidFill>
+                  </a:tcPr>
+                </a:tc>
+                <a:extLst>
+                  <a:ext uri="{0D108BD9-81ED-4DB2-BD59-A6C34878D82A}">
+                    <a16:rowId xmlns:a16="http://schemas.microsoft.com/office/drawing/2014/main" val="10000"/>
+                  </a:ext>
+                </a:extLst>
+              </a:tr>
+              <a:tr h="637018">
+                <a:tc>
+                  <a:txBody>
+                    <a:bodyPr/>
+                    <a:lstStyle/>
+                    <a:p>
+                      <a:pPr marL="0" indent="0" algn="l">
+                        <a:buFont typeface="Arial" panose="020B0604020202020204" pitchFamily="34" charset="0"/>
+                        <a:buNone/>
+                      </a:pPr>
+                      <a:r>
+                        <a:rPr lang="en-US" sz="1400" b="1" dirty="0">
+                          <a:solidFill>
+                            <a:srgbClr val="374151"/>
+                          </a:solidFill>
+                          <a:latin typeface="Calibri" pitchFamily="34" charset="0"/>
+                          <a:ea typeface="Calibri" pitchFamily="34" charset="-122"/>
+                          <a:cs typeface="Calibri" pitchFamily="34" charset="-120"/>
+                        </a:rPr>
+                        <a:t>For priority based:</a:t>
+                      </a:r>
+                    </a:p>
+                    <a:p>
+                      <a:pPr marL="285750" indent="-285750" algn="l">
+                        <a:buFont typeface="Arial" panose="020B0604020202020204" pitchFamily="34" charset="0"/>
+                        <a:buChar char="•"/>
+                      </a:pPr>
+                      <a:r>
+                        <a:rPr lang="en-US" sz="1400" dirty="0">
+                          <a:solidFill>
+                            <a:srgbClr val="374151"/>
+                          </a:solidFill>
+                          <a:latin typeface="Calibri" pitchFamily="34" charset="0"/>
+                          <a:ea typeface="Calibri" pitchFamily="34" charset="-122"/>
+                          <a:cs typeface="Calibri" pitchFamily="34" charset="-120"/>
+                        </a:rPr>
+                        <a:t>Edited the </a:t>
+                      </a:r>
+                      <a:r>
+                        <a:rPr lang="en-US" sz="1400" u="sng" dirty="0">
+                          <a:solidFill>
+                            <a:srgbClr val="374151"/>
+                          </a:solidFill>
+                          <a:latin typeface="Calibri" pitchFamily="34" charset="0"/>
+                          <a:ea typeface="Calibri" pitchFamily="34" charset="-122"/>
+                          <a:cs typeface="Calibri" pitchFamily="34" charset="-120"/>
+                        </a:rPr>
+                        <a:t>scheduler()</a:t>
+                      </a:r>
+                      <a:r>
+                        <a:rPr lang="en-US" sz="1400" u="none" dirty="0">
+                          <a:solidFill>
+                            <a:srgbClr val="374151"/>
+                          </a:solidFill>
+                          <a:latin typeface="Calibri" pitchFamily="34" charset="0"/>
+                          <a:ea typeface="Calibri" pitchFamily="34" charset="-122"/>
+                          <a:cs typeface="Calibri" pitchFamily="34" charset="-120"/>
+                        </a:rPr>
+                        <a:t> </a:t>
+                      </a:r>
+                      <a:r>
+                        <a:rPr lang="en-US" sz="1400" dirty="0">
+                          <a:solidFill>
+                            <a:srgbClr val="374151"/>
+                          </a:solidFill>
+                          <a:latin typeface="Calibri" pitchFamily="34" charset="0"/>
+                          <a:ea typeface="Calibri" pitchFamily="34" charset="-122"/>
+                          <a:cs typeface="Calibri" pitchFamily="34" charset="-120"/>
+                        </a:rPr>
+                        <a:t>function in </a:t>
+                      </a:r>
+                      <a:r>
+                        <a:rPr lang="en-US" sz="1400" dirty="0" err="1">
+                          <a:solidFill>
+                            <a:srgbClr val="00B0F0"/>
+                          </a:solidFill>
+                          <a:latin typeface="Calibri" pitchFamily="34" charset="0"/>
+                          <a:ea typeface="Calibri" pitchFamily="34" charset="-122"/>
+                          <a:cs typeface="Calibri" pitchFamily="34" charset="-120"/>
+                        </a:rPr>
+                        <a:t>proc.c</a:t>
+                      </a:r>
+                      <a:endParaRPr lang="en-US" sz="1400" dirty="0">
+                        <a:solidFill>
+                          <a:srgbClr val="00B0F0"/>
+                        </a:solidFill>
+                        <a:latin typeface="Calibri" charset="0"/>
+                        <a:ea typeface="Calibri" charset="0"/>
+                        <a:cs typeface="Calibri" charset="0"/>
+                      </a:endParaRPr>
+                    </a:p>
+                  </a:txBody>
+                  <a:tcPr anchor="ctr">
+                    <a:lnL w="6350" cap="flat" cmpd="sng" algn="ctr">
+                      <a:solidFill>
+                        <a:srgbClr val="E5E7EB"/>
+                      </a:solidFill>
+                      <a:prstDash val="solid"/>
+                      <a:round/>
+                      <a:headEnd type="none" w="med" len="med"/>
+                      <a:tailEnd type="none" w="med" len="med"/>
+                    </a:lnL>
+                    <a:lnR w="6350" cap="flat" cmpd="sng" algn="ctr">
+                      <a:solidFill>
+                        <a:srgbClr val="E5E7EB"/>
+                      </a:solidFill>
+                      <a:prstDash val="solid"/>
+                      <a:round/>
+                      <a:headEnd type="none" w="med" len="med"/>
+                      <a:tailEnd type="none" w="med" len="med"/>
+                    </a:lnR>
+                    <a:lnT w="6350" cap="flat" cmpd="sng" algn="ctr">
+                      <a:solidFill>
+                        <a:srgbClr val="E5E7EB"/>
+                      </a:solidFill>
+                      <a:prstDash val="solid"/>
+                      <a:round/>
+                      <a:headEnd type="none" w="med" len="med"/>
+                      <a:tailEnd type="none" w="med" len="med"/>
+                    </a:lnT>
+                    <a:lnB w="6350" cap="flat" cmpd="sng" algn="ctr">
+                      <a:solidFill>
+                        <a:srgbClr val="E5E7EB"/>
+                      </a:solidFill>
+                      <a:prstDash val="solid"/>
+                      <a:round/>
+                      <a:headEnd type="none" w="med" len="med"/>
+                      <a:tailEnd type="none" w="med" len="med"/>
+                    </a:lnB>
+                    <a:solidFill>
+                      <a:srgbClr val="FFFFFF"/>
+                    </a:solidFill>
+                  </a:tcPr>
+                </a:tc>
+                <a:tc rowSpan="2">
+                  <a:txBody>
+                    <a:bodyPr/>
+                    <a:lstStyle/>
+                    <a:p>
+                      <a:pPr marL="285750" indent="-285750" algn="l">
+                        <a:buFont typeface="Arial" panose="020B0604020202020204" pitchFamily="34" charset="0"/>
+                        <a:buChar char="•"/>
+                      </a:pPr>
+                      <a:r>
+                        <a:rPr lang="en-US" sz="1400" dirty="0">
+                          <a:solidFill>
+                            <a:srgbClr val="374151"/>
+                          </a:solidFill>
+                          <a:latin typeface="Calibri" pitchFamily="34" charset="0"/>
+                          <a:ea typeface="Calibri" pitchFamily="34" charset="-122"/>
+                          <a:cs typeface="Calibri" pitchFamily="34" charset="-120"/>
+                        </a:rPr>
+                        <a:t>Ran the user programs </a:t>
+                      </a:r>
+                      <a:r>
+                        <a:rPr lang="en-US" sz="1400" dirty="0" err="1">
+                          <a:solidFill>
+                            <a:srgbClr val="374151"/>
+                          </a:solidFill>
+                          <a:latin typeface="Calibri" pitchFamily="34" charset="0"/>
+                          <a:ea typeface="Calibri" pitchFamily="34" charset="-122"/>
+                          <a:cs typeface="Calibri" pitchFamily="34" charset="-120"/>
+                        </a:rPr>
+                        <a:t>test_setpriority.c</a:t>
+                      </a:r>
+                      <a:r>
+                        <a:rPr lang="en-US" sz="1400" dirty="0">
+                          <a:solidFill>
+                            <a:srgbClr val="374151"/>
+                          </a:solidFill>
+                          <a:latin typeface="Calibri" pitchFamily="34" charset="0"/>
+                          <a:ea typeface="Calibri" pitchFamily="34" charset="-122"/>
+                          <a:cs typeface="Calibri" pitchFamily="34" charset="-120"/>
+                        </a:rPr>
+                        <a:t> &amp; </a:t>
+                      </a:r>
+                      <a:r>
+                        <a:rPr lang="en-US" sz="1400" dirty="0" err="1">
+                          <a:solidFill>
+                            <a:srgbClr val="374151"/>
+                          </a:solidFill>
+                          <a:latin typeface="Calibri" pitchFamily="34" charset="0"/>
+                          <a:ea typeface="Calibri" pitchFamily="34" charset="-122"/>
+                          <a:cs typeface="Calibri" pitchFamily="34" charset="-120"/>
+                        </a:rPr>
+                        <a:t>test_printptable.c</a:t>
+                      </a:r>
+                      <a:r>
+                        <a:rPr lang="en-US" sz="1400" dirty="0">
+                          <a:solidFill>
+                            <a:srgbClr val="374151"/>
+                          </a:solidFill>
+                          <a:latin typeface="Calibri" pitchFamily="34" charset="0"/>
+                          <a:ea typeface="Calibri" pitchFamily="34" charset="-122"/>
+                          <a:cs typeface="Calibri" pitchFamily="34" charset="-120"/>
+                        </a:rPr>
+                        <a:t> with the two schedulers</a:t>
+                      </a:r>
+                    </a:p>
+                    <a:p>
+                      <a:pPr marL="285750" indent="-285750" algn="l">
+                        <a:buFont typeface="Arial" panose="020B0604020202020204" pitchFamily="34" charset="0"/>
+                        <a:buChar char="•"/>
+                      </a:pPr>
+                      <a:r>
+                        <a:rPr lang="en-US" sz="1400" dirty="0">
+                          <a:solidFill>
+                            <a:srgbClr val="374151"/>
+                          </a:solidFill>
+                          <a:latin typeface="Calibri" pitchFamily="34" charset="0"/>
+                          <a:ea typeface="Calibri" pitchFamily="34" charset="-122"/>
+                          <a:cs typeface="Calibri" pitchFamily="34" charset="-120"/>
+                        </a:rPr>
+                        <a:t>Compared total wait time for the two schedulers</a:t>
+                      </a:r>
+                      <a:endParaRPr lang="en-US" sz="1400" dirty="0">
+                        <a:latin typeface="Calibri" charset="0"/>
+                        <a:ea typeface="Calibri" charset="0"/>
+                        <a:cs typeface="Calibri" charset="0"/>
+                      </a:endParaRPr>
+                    </a:p>
+                  </a:txBody>
+                  <a:tcPr anchor="ctr">
+                    <a:lnL w="6350" cap="flat" cmpd="sng" algn="ctr">
+                      <a:solidFill>
+                        <a:srgbClr val="E5E7EB"/>
+                      </a:solidFill>
+                      <a:prstDash val="solid"/>
+                      <a:round/>
+                      <a:headEnd type="none" w="med" len="med"/>
+                      <a:tailEnd type="none" w="med" len="med"/>
+                    </a:lnL>
+                    <a:lnR w="6350" cap="flat" cmpd="sng" algn="ctr">
+                      <a:solidFill>
+                        <a:srgbClr val="E5E7EB"/>
+                      </a:solidFill>
+                      <a:prstDash val="solid"/>
+                      <a:round/>
+                      <a:headEnd type="none" w="med" len="med"/>
+                      <a:tailEnd type="none" w="med" len="med"/>
+                    </a:lnR>
+                    <a:lnT w="6350" cap="flat" cmpd="sng" algn="ctr">
+                      <a:solidFill>
+                        <a:srgbClr val="E5E7EB"/>
+                      </a:solidFill>
+                      <a:prstDash val="solid"/>
+                      <a:round/>
+                      <a:headEnd type="none" w="med" len="med"/>
+                      <a:tailEnd type="none" w="med" len="med"/>
+                    </a:lnT>
+                    <a:lnB w="6350" cap="flat" cmpd="sng" algn="ctr">
+                      <a:solidFill>
+                        <a:srgbClr val="E5E7EB"/>
+                      </a:solidFill>
+                      <a:prstDash val="solid"/>
+                      <a:round/>
+                      <a:headEnd type="none" w="med" len="med"/>
+                      <a:tailEnd type="none" w="med" len="med"/>
+                    </a:lnB>
+                    <a:solidFill>
+                      <a:srgbClr val="FFFFFF"/>
+                    </a:solidFill>
+                  </a:tcPr>
+                </a:tc>
+                <a:extLst>
+                  <a:ext uri="{0D108BD9-81ED-4DB2-BD59-A6C34878D82A}">
+                    <a16:rowId xmlns:a16="http://schemas.microsoft.com/office/drawing/2014/main" val="10002"/>
+                  </a:ext>
+                </a:extLst>
+              </a:tr>
+              <a:tr h="1526722">
+                <a:tc>
+                  <a:txBody>
+                    <a:bodyPr/>
+                    <a:lstStyle/>
+                    <a:p>
+                      <a:pPr marL="0" indent="0" algn="l">
+                        <a:buFont typeface="Arial" panose="020B0604020202020204" pitchFamily="34" charset="0"/>
+                        <a:buNone/>
+                      </a:pPr>
+                      <a:r>
+                        <a:rPr lang="en-US" sz="1400" b="1" dirty="0">
+                          <a:solidFill>
+                            <a:srgbClr val="374151"/>
+                          </a:solidFill>
+                          <a:latin typeface="Calibri" pitchFamily="34" charset="0"/>
+                          <a:ea typeface="Calibri" pitchFamily="34" charset="-122"/>
+                          <a:cs typeface="Calibri" pitchFamily="34" charset="-120"/>
+                        </a:rPr>
+                        <a:t>For priority based:</a:t>
+                      </a:r>
+                    </a:p>
+                    <a:p>
+                      <a:pPr marL="285750" indent="-285750" algn="l">
+                        <a:buFont typeface="Arial" panose="020B0604020202020204" pitchFamily="34" charset="0"/>
+                        <a:buChar char="•"/>
+                      </a:pPr>
+                      <a:r>
+                        <a:rPr lang="en-US" sz="1400" dirty="0">
+                          <a:solidFill>
+                            <a:srgbClr val="374151"/>
+                          </a:solidFill>
+                          <a:latin typeface="Calibri" pitchFamily="34" charset="0"/>
+                          <a:ea typeface="Calibri" pitchFamily="34" charset="-122"/>
+                          <a:cs typeface="Calibri" pitchFamily="34" charset="-120"/>
+                        </a:rPr>
+                        <a:t>Edited the </a:t>
+                      </a:r>
+                      <a:r>
+                        <a:rPr lang="en-US" sz="1400" u="sng" dirty="0">
+                          <a:solidFill>
+                            <a:srgbClr val="374151"/>
+                          </a:solidFill>
+                          <a:latin typeface="Calibri" pitchFamily="34" charset="0"/>
+                          <a:ea typeface="Calibri" pitchFamily="34" charset="-122"/>
+                          <a:cs typeface="Calibri" pitchFamily="34" charset="-120"/>
+                        </a:rPr>
+                        <a:t>scheduler()</a:t>
+                      </a:r>
+                      <a:r>
+                        <a:rPr lang="en-US" sz="1400" dirty="0">
+                          <a:solidFill>
+                            <a:srgbClr val="374151"/>
+                          </a:solidFill>
+                          <a:latin typeface="Calibri" pitchFamily="34" charset="0"/>
+                          <a:ea typeface="Calibri" pitchFamily="34" charset="-122"/>
+                          <a:cs typeface="Calibri" pitchFamily="34" charset="-120"/>
+                        </a:rPr>
+                        <a:t> function in </a:t>
+                      </a:r>
+                      <a:r>
+                        <a:rPr lang="en-US" sz="1400" dirty="0" err="1">
+                          <a:solidFill>
+                            <a:srgbClr val="00B0F0"/>
+                          </a:solidFill>
+                          <a:latin typeface="Calibri" pitchFamily="34" charset="0"/>
+                          <a:ea typeface="Calibri" pitchFamily="34" charset="-122"/>
+                          <a:cs typeface="Calibri" pitchFamily="34" charset="-120"/>
+                        </a:rPr>
+                        <a:t>proc.c</a:t>
+                      </a:r>
+                      <a:endParaRPr lang="en-US" sz="1400" dirty="0">
+                        <a:solidFill>
+                          <a:schemeClr val="tx1"/>
+                        </a:solidFill>
+                        <a:latin typeface="Calibri" charset="0"/>
+                        <a:ea typeface="Calibri" charset="0"/>
+                        <a:cs typeface="Calibri" charset="0"/>
+                      </a:endParaRPr>
+                    </a:p>
+                    <a:p>
+                      <a:pPr marL="285750" indent="-285750" algn="l">
+                        <a:buFont typeface="Arial" panose="020B0604020202020204" pitchFamily="34" charset="0"/>
+                        <a:buChar char="•"/>
+                      </a:pPr>
+                      <a:r>
+                        <a:rPr lang="en-US" sz="1400" dirty="0">
+                          <a:solidFill>
+                            <a:schemeClr val="tx1"/>
+                          </a:solidFill>
+                          <a:latin typeface="Calibri" charset="0"/>
+                          <a:ea typeface="Calibri" charset="0"/>
+                          <a:cs typeface="Calibri" charset="0"/>
+                        </a:rPr>
+                        <a:t>Added </a:t>
+                      </a:r>
+                      <a:r>
+                        <a:rPr lang="en-US" sz="1400" dirty="0" err="1">
+                          <a:solidFill>
+                            <a:schemeClr val="tx1"/>
+                          </a:solidFill>
+                          <a:latin typeface="Calibri" charset="0"/>
+                          <a:ea typeface="Calibri" charset="0"/>
+                          <a:cs typeface="Calibri" charset="0"/>
+                        </a:rPr>
+                        <a:t>max_priority</a:t>
+                      </a:r>
+                      <a:r>
+                        <a:rPr lang="en-US" sz="1400" dirty="0">
+                          <a:solidFill>
+                            <a:schemeClr val="tx1"/>
+                          </a:solidFill>
+                          <a:latin typeface="Calibri" charset="0"/>
+                          <a:ea typeface="Calibri" charset="0"/>
+                          <a:cs typeface="Calibri" charset="0"/>
+                        </a:rPr>
+                        <a:t> attribute for struct proc in </a:t>
+                      </a:r>
+                      <a:r>
+                        <a:rPr lang="en-US" sz="1400" dirty="0" err="1">
+                          <a:solidFill>
+                            <a:srgbClr val="00B0F0"/>
+                          </a:solidFill>
+                          <a:latin typeface="Calibri" charset="0"/>
+                          <a:ea typeface="Calibri" charset="0"/>
+                          <a:cs typeface="Calibri" charset="0"/>
+                        </a:rPr>
+                        <a:t>proc.h</a:t>
+                      </a:r>
+                      <a:endParaRPr lang="en-US" sz="1400" dirty="0">
+                        <a:solidFill>
+                          <a:srgbClr val="00B0F0"/>
+                        </a:solidFill>
+                        <a:latin typeface="Calibri" charset="0"/>
+                        <a:ea typeface="Calibri" charset="0"/>
+                        <a:cs typeface="Calibri" charset="0"/>
+                      </a:endParaRPr>
+                    </a:p>
+                    <a:p>
+                      <a:pPr marL="285750" indent="-285750" algn="l">
+                        <a:buFont typeface="Arial" panose="020B0604020202020204" pitchFamily="34" charset="0"/>
+                        <a:buChar char="•"/>
+                      </a:pPr>
+                      <a:r>
+                        <a:rPr lang="en-US" sz="1400" dirty="0">
+                          <a:solidFill>
+                            <a:schemeClr val="tx1"/>
+                          </a:solidFill>
+                          <a:latin typeface="Calibri" charset="0"/>
+                          <a:ea typeface="Calibri" charset="0"/>
+                          <a:cs typeface="Calibri" charset="0"/>
+                        </a:rPr>
+                        <a:t>Initialized </a:t>
+                      </a:r>
+                      <a:r>
+                        <a:rPr lang="en-US" sz="1400" dirty="0" err="1">
+                          <a:solidFill>
+                            <a:schemeClr val="tx1"/>
+                          </a:solidFill>
+                          <a:latin typeface="Calibri" charset="0"/>
+                          <a:ea typeface="Calibri" charset="0"/>
+                          <a:cs typeface="Calibri" charset="0"/>
+                        </a:rPr>
+                        <a:t>max_priority</a:t>
+                      </a:r>
+                      <a:r>
+                        <a:rPr lang="en-US" sz="1400" dirty="0">
+                          <a:solidFill>
+                            <a:schemeClr val="tx1"/>
+                          </a:solidFill>
+                          <a:latin typeface="Calibri" charset="0"/>
+                          <a:ea typeface="Calibri" charset="0"/>
+                          <a:cs typeface="Calibri" charset="0"/>
+                        </a:rPr>
+                        <a:t> with 10 in </a:t>
+                      </a:r>
+                      <a:r>
+                        <a:rPr lang="en-US" sz="1400" dirty="0" err="1">
+                          <a:solidFill>
+                            <a:schemeClr val="tx1"/>
+                          </a:solidFill>
+                          <a:latin typeface="Calibri" charset="0"/>
+                          <a:ea typeface="Calibri" charset="0"/>
+                          <a:cs typeface="Calibri" charset="0"/>
+                        </a:rPr>
+                        <a:t>allocproc</a:t>
+                      </a:r>
+                      <a:r>
+                        <a:rPr lang="en-US" sz="1400" dirty="0">
+                          <a:solidFill>
+                            <a:schemeClr val="tx1"/>
+                          </a:solidFill>
+                          <a:latin typeface="Calibri" charset="0"/>
+                          <a:ea typeface="Calibri" charset="0"/>
+                          <a:cs typeface="Calibri" charset="0"/>
+                        </a:rPr>
+                        <a:t>() in </a:t>
+                      </a:r>
+                      <a:r>
+                        <a:rPr lang="en-US" sz="1400" dirty="0" err="1">
+                          <a:solidFill>
+                            <a:srgbClr val="00B0F0"/>
+                          </a:solidFill>
+                          <a:latin typeface="Calibri" charset="0"/>
+                          <a:ea typeface="Calibri" charset="0"/>
+                          <a:cs typeface="Calibri" charset="0"/>
+                        </a:rPr>
+                        <a:t>proc.c</a:t>
+                      </a:r>
+                      <a:endParaRPr lang="en-US" sz="1400" dirty="0">
+                        <a:solidFill>
+                          <a:srgbClr val="00B0F0"/>
+                        </a:solidFill>
+                        <a:latin typeface="Calibri" charset="0"/>
+                        <a:ea typeface="Calibri" charset="0"/>
+                        <a:cs typeface="Calibri" charset="0"/>
+                      </a:endParaRPr>
+                    </a:p>
+                    <a:p>
+                      <a:pPr marL="285750" indent="-285750" algn="l">
+                        <a:buFont typeface="Arial" panose="020B0604020202020204" pitchFamily="34" charset="0"/>
+                        <a:buChar char="•"/>
+                      </a:pPr>
+                      <a:r>
+                        <a:rPr lang="en-US" sz="1400" dirty="0">
+                          <a:solidFill>
+                            <a:schemeClr val="tx1"/>
+                          </a:solidFill>
+                          <a:latin typeface="Calibri" charset="0"/>
+                          <a:ea typeface="Calibri" charset="0"/>
+                          <a:cs typeface="Calibri" charset="0"/>
+                        </a:rPr>
+                        <a:t>Updated </a:t>
+                      </a:r>
+                      <a:r>
+                        <a:rPr lang="en-US" sz="1400" dirty="0" err="1">
+                          <a:solidFill>
+                            <a:schemeClr val="tx1"/>
+                          </a:solidFill>
+                          <a:latin typeface="Calibri" charset="0"/>
+                          <a:ea typeface="Calibri" charset="0"/>
+                          <a:cs typeface="Calibri" charset="0"/>
+                        </a:rPr>
+                        <a:t>max_priority’s</a:t>
+                      </a:r>
+                      <a:r>
+                        <a:rPr lang="en-US" sz="1400" dirty="0">
+                          <a:solidFill>
+                            <a:schemeClr val="tx1"/>
+                          </a:solidFill>
+                          <a:latin typeface="Calibri" charset="0"/>
+                          <a:ea typeface="Calibri" charset="0"/>
+                          <a:cs typeface="Calibri" charset="0"/>
+                        </a:rPr>
+                        <a:t> value in </a:t>
+                      </a:r>
+                      <a:r>
+                        <a:rPr lang="en-US" sz="1400" dirty="0" err="1">
+                          <a:solidFill>
+                            <a:schemeClr val="tx1"/>
+                          </a:solidFill>
+                          <a:latin typeface="Calibri" charset="0"/>
+                          <a:ea typeface="Calibri" charset="0"/>
+                          <a:cs typeface="Calibri" charset="0"/>
+                        </a:rPr>
+                        <a:t>setpriority</a:t>
+                      </a:r>
+                      <a:r>
+                        <a:rPr lang="en-US" sz="1400" dirty="0">
+                          <a:solidFill>
+                            <a:schemeClr val="tx1"/>
+                          </a:solidFill>
+                          <a:latin typeface="Calibri" charset="0"/>
+                          <a:ea typeface="Calibri" charset="0"/>
+                          <a:cs typeface="Calibri" charset="0"/>
+                        </a:rPr>
+                        <a:t>() in </a:t>
+                      </a:r>
+                      <a:r>
+                        <a:rPr lang="en-US" sz="1400" dirty="0" err="1">
+                          <a:solidFill>
+                            <a:srgbClr val="00B0F0"/>
+                          </a:solidFill>
+                          <a:latin typeface="Calibri" charset="0"/>
+                          <a:ea typeface="Calibri" charset="0"/>
+                          <a:cs typeface="Calibri" charset="0"/>
+                        </a:rPr>
+                        <a:t>proc.c</a:t>
+                      </a:r>
+                      <a:endParaRPr lang="en-US" sz="1400" dirty="0">
+                        <a:solidFill>
+                          <a:srgbClr val="00B0F0"/>
+                        </a:solidFill>
+                        <a:latin typeface="Calibri" charset="0"/>
+                        <a:ea typeface="Calibri" charset="0"/>
+                        <a:cs typeface="Calibri" charset="0"/>
+                      </a:endParaRPr>
+                    </a:p>
+                    <a:p>
+                      <a:pPr marL="285750" indent="-285750" algn="l">
+                        <a:buFont typeface="Arial" panose="020B0604020202020204" pitchFamily="34" charset="0"/>
+                        <a:buChar char="•"/>
+                      </a:pPr>
+                      <a:endParaRPr lang="en-US" sz="1400" dirty="0">
+                        <a:solidFill>
+                          <a:schemeClr val="tx1"/>
+                        </a:solidFill>
+                        <a:latin typeface="Calibri" charset="0"/>
+                        <a:ea typeface="Calibri" charset="0"/>
+                        <a:cs typeface="Calibri" charset="0"/>
+                      </a:endParaRPr>
+                    </a:p>
+                  </a:txBody>
+                  <a:tcPr anchor="ctr">
+                    <a:lnL w="6350" cap="flat" cmpd="sng" algn="ctr">
+                      <a:solidFill>
+                        <a:srgbClr val="E5E7EB"/>
+                      </a:solidFill>
+                      <a:prstDash val="solid"/>
+                      <a:round/>
+                      <a:headEnd type="none" w="med" len="med"/>
+                      <a:tailEnd type="none" w="med" len="med"/>
+                    </a:lnL>
+                    <a:lnR w="6350" cap="flat" cmpd="sng" algn="ctr">
+                      <a:solidFill>
+                        <a:srgbClr val="E5E7EB"/>
+                      </a:solidFill>
+                      <a:prstDash val="solid"/>
+                      <a:round/>
+                      <a:headEnd type="none" w="med" len="med"/>
+                      <a:tailEnd type="none" w="med" len="med"/>
+                    </a:lnR>
+                    <a:lnT w="6350" cap="flat" cmpd="sng" algn="ctr">
+                      <a:solidFill>
+                        <a:srgbClr val="E5E7EB"/>
+                      </a:solidFill>
+                      <a:prstDash val="solid"/>
+                      <a:round/>
+                      <a:headEnd type="none" w="med" len="med"/>
+                      <a:tailEnd type="none" w="med" len="med"/>
+                    </a:lnT>
+                    <a:lnB w="6350" cap="flat" cmpd="sng" algn="ctr">
+                      <a:solidFill>
+                        <a:srgbClr val="E5E7EB"/>
+                      </a:solidFill>
+                      <a:prstDash val="solid"/>
+                      <a:round/>
+                      <a:headEnd type="none" w="med" len="med"/>
+                      <a:tailEnd type="none" w="med" len="med"/>
+                    </a:lnB>
+                    <a:solidFill>
+                      <a:srgbClr val="FFFFFF"/>
+                    </a:solidFill>
+                  </a:tcPr>
+                </a:tc>
+                <a:tc vMerge="1">
+                  <a:txBody>
+                    <a:bodyPr/>
+                    <a:lstStyle/>
+                    <a:p>
+                      <a:endParaRPr lang="en-US"/>
+                    </a:p>
+                  </a:txBody>
+                  <a:tcPr/>
+                </a:tc>
+                <a:extLst>
+                  <a:ext uri="{0D108BD9-81ED-4DB2-BD59-A6C34878D82A}">
+                    <a16:rowId xmlns:a16="http://schemas.microsoft.com/office/drawing/2014/main" val="647613968"/>
+                  </a:ext>
+                </a:extLst>
+              </a:tr>
+            </a:tbl>
+          </a:graphicData>
+        </a:graphic>
+      </p:graphicFrame>
+    </p:spTree>
+    <p:extLst>
+      <p:ext uri="{BB962C8B-B14F-4D97-AF65-F5344CB8AC3E}">
+        <p14:creationId xmlns:p14="http://schemas.microsoft.com/office/powerpoint/2010/main" val="350305432"/>
+      </p:ext>
+    </p:extLst>
+  </p:cSld>
+  <p:clrMapOvr>
+    <a:masterClrMapping/>
+  </p:clrMapOvr>
+</p:sld>
+</file>
+
+<file path=ppt/slides/slide14.xml><?xml version="1.0" encoding="utf-8"?>
+<p:sld xmlns:a="http://schemas.openxmlformats.org/drawingml/2006/main" xmlns:r="http://schemas.openxmlformats.org/officeDocument/2006/relationships" xmlns:p="http://schemas.openxmlformats.org/presentationml/2006/main">
+  <p:cSld>
+    <p:bg>
+      <p:bgPr>
+        <a:solidFill>
+          <a:srgbClr val="FFFFFF"/>
+        </a:solidFill>
+        <a:effectLst/>
+      </p:bgPr>
+    </p:bg>
+    <p:spTree>
+      <p:nvGrpSpPr>
+        <p:cNvPr id="1" name="">
+          <a:extLst>
+            <a:ext uri="{FF2B5EF4-FFF2-40B4-BE49-F238E27FC236}">
+              <a16:creationId xmlns:a16="http://schemas.microsoft.com/office/drawing/2014/main" id="{3403A5DD-B363-72CF-2C87-A6272FA62EE3}"/>
+            </a:ext>
+          </a:extLst>
+        </p:cNvPr>
+        <p:cNvGrpSpPr/>
+        <p:nvPr/>
+      </p:nvGrpSpPr>
+      <p:grpSpPr>
+        <a:xfrm>
+          <a:off x="0" y="0"/>
+          <a:ext cx="0" cy="0"/>
+          <a:chOff x="0" y="0"/>
+          <a:chExt cx="0" cy="0"/>
+        </a:xfrm>
+      </p:grpSpPr>
+      <p:sp>
+        <p:nvSpPr>
+          <p:cNvPr id="2" name="Shape 0">
+            <a:extLst>
+              <a:ext uri="{FF2B5EF4-FFF2-40B4-BE49-F238E27FC236}">
+                <a16:creationId xmlns:a16="http://schemas.microsoft.com/office/drawing/2014/main" id="{440BA673-7314-5428-61F9-0BED86528B44}"/>
+              </a:ext>
+            </a:extLst>
+          </p:cNvPr>
+          <p:cNvSpPr/>
+          <p:nvPr/>
+        </p:nvSpPr>
+        <p:spPr>
+          <a:xfrm>
+            <a:off x="0" y="0"/>
+            <a:ext cx="164592" cy="5143500"/>
+          </a:xfrm>
+          <a:prstGeom prst="rect">
+            <a:avLst/>
+          </a:prstGeom>
+          <a:solidFill>
+            <a:srgbClr val="1B2A4A"/>
+          </a:solidFill>
+          <a:ln w="12700">
+            <a:solidFill>
+              <a:srgbClr val="1B2A4A"/>
+            </a:solidFill>
+            <a:prstDash val="solid"/>
+          </a:ln>
+        </p:spPr>
+        <p:txBody>
+          <a:bodyPr/>
+          <a:lstStyle/>
+          <a:p>
+            <a:pPr marL="0" marR="0" lvl="0" indent="0" algn="l" defTabSz="914400" rtl="0" eaLnBrk="1" fontAlgn="auto" latinLnBrk="0" hangingPunct="1">
+              <a:lnSpc>
+                <a:spcPct val="100000"/>
+              </a:lnSpc>
+              <a:spcBef>
+                <a:spcPts val="0"/>
+              </a:spcBef>
+              <a:spcAft>
+                <a:spcPts val="0"/>
+              </a:spcAft>
+              <a:buClrTx/>
+              <a:buSzTx/>
+              <a:buFontTx/>
+              <a:buNone/>
+              <a:tabLst/>
+              <a:defRPr/>
+            </a:pPr>
+            <a:endParaRPr kumimoji="0" lang="en-US" sz="1800" b="0" i="0" u="none" strike="noStrike" kern="1200" cap="none" spc="0" normalizeH="0" baseline="0" noProof="0">
+              <a:ln>
+                <a:noFill/>
+              </a:ln>
+              <a:solidFill>
+                <a:prstClr val="black"/>
+              </a:solidFill>
+              <a:effectLst/>
+              <a:uLnTx/>
+              <a:uFillTx/>
+              <a:latin typeface="Calibri" panose="020F0502020204030204"/>
+              <a:ea typeface="+mn-ea"/>
+              <a:cs typeface="+mn-cs"/>
+            </a:endParaRPr>
+          </a:p>
+        </p:txBody>
+      </p:sp>
+      <p:sp>
+        <p:nvSpPr>
+          <p:cNvPr id="3" name="Shape 1">
+            <a:extLst>
+              <a:ext uri="{FF2B5EF4-FFF2-40B4-BE49-F238E27FC236}">
+                <a16:creationId xmlns:a16="http://schemas.microsoft.com/office/drawing/2014/main" id="{C8971CF8-D360-C1AC-A2BE-8410584E1FAE}"/>
+              </a:ext>
+            </a:extLst>
+          </p:cNvPr>
+          <p:cNvSpPr/>
+          <p:nvPr/>
+        </p:nvSpPr>
+        <p:spPr>
+          <a:xfrm>
+            <a:off x="164592" y="0"/>
+            <a:ext cx="8979408" cy="713232"/>
+          </a:xfrm>
+          <a:prstGeom prst="rect">
+            <a:avLst/>
+          </a:prstGeom>
+          <a:solidFill>
+            <a:srgbClr val="F4F6FA"/>
+          </a:solidFill>
+          <a:ln w="12700">
+            <a:solidFill>
+              <a:srgbClr val="F4F6FA"/>
+            </a:solidFill>
+            <a:prstDash val="solid"/>
+          </a:ln>
+        </p:spPr>
+        <p:txBody>
+          <a:bodyPr/>
+          <a:lstStyle/>
+          <a:p>
+            <a:pPr marL="0" marR="0" lvl="0" indent="0" algn="l" defTabSz="914400" rtl="0" eaLnBrk="1" fontAlgn="auto" latinLnBrk="0" hangingPunct="1">
+              <a:lnSpc>
+                <a:spcPct val="100000"/>
+              </a:lnSpc>
+              <a:spcBef>
+                <a:spcPts val="0"/>
+              </a:spcBef>
+              <a:spcAft>
+                <a:spcPts val="0"/>
+              </a:spcAft>
+              <a:buClrTx/>
+              <a:buSzTx/>
+              <a:buFontTx/>
+              <a:buNone/>
+              <a:tabLst/>
+              <a:defRPr/>
+            </a:pPr>
+            <a:endParaRPr kumimoji="0" lang="en-US" sz="1800" b="0" i="0" u="none" strike="noStrike" kern="1200" cap="none" spc="0" normalizeH="0" baseline="0" noProof="0">
+              <a:ln>
+                <a:noFill/>
+              </a:ln>
+              <a:solidFill>
+                <a:prstClr val="black"/>
+              </a:solidFill>
+              <a:effectLst/>
+              <a:uLnTx/>
+              <a:uFillTx/>
+              <a:latin typeface="Calibri" panose="020F0502020204030204"/>
+              <a:ea typeface="+mn-ea"/>
+              <a:cs typeface="+mn-cs"/>
+            </a:endParaRPr>
+          </a:p>
+        </p:txBody>
+      </p:sp>
+      <p:sp>
+        <p:nvSpPr>
+          <p:cNvPr id="4" name="Text 2">
+            <a:extLst>
+              <a:ext uri="{FF2B5EF4-FFF2-40B4-BE49-F238E27FC236}">
+                <a16:creationId xmlns:a16="http://schemas.microsoft.com/office/drawing/2014/main" id="{E565F6DC-463D-3EF5-BB5B-30392C4C229C}"/>
+              </a:ext>
+            </a:extLst>
+          </p:cNvPr>
+          <p:cNvSpPr/>
+          <p:nvPr/>
+        </p:nvSpPr>
+        <p:spPr>
+          <a:xfrm>
+            <a:off x="347472" y="0"/>
+            <a:ext cx="8595360" cy="713232"/>
+          </a:xfrm>
+          <a:prstGeom prst="rect">
+            <a:avLst/>
+          </a:prstGeom>
+          <a:noFill/>
+          <a:ln/>
+        </p:spPr>
+        <p:txBody>
+          <a:bodyPr wrap="square" lIns="0" tIns="0" rIns="0" bIns="0" rtlCol="0" anchor="ctr"/>
+          <a:lstStyle/>
+          <a:p>
+            <a:pPr marL="0" marR="0" lvl="0" indent="0" algn="l" defTabSz="914400" rtl="0" eaLnBrk="1" fontAlgn="auto" latinLnBrk="0" hangingPunct="1">
+              <a:lnSpc>
+                <a:spcPct val="100000"/>
+              </a:lnSpc>
+              <a:spcBef>
+                <a:spcPts val="0"/>
+              </a:spcBef>
+              <a:spcAft>
+                <a:spcPts val="0"/>
+              </a:spcAft>
+              <a:buClrTx/>
+              <a:buSzTx/>
+              <a:buFontTx/>
+              <a:buNone/>
+              <a:tabLst/>
+              <a:defRPr/>
+            </a:pPr>
+            <a:r>
+              <a:rPr kumimoji="0" lang="en-US" sz="2200" b="1" i="0" u="none" strike="noStrike" kern="1200" cap="none" spc="0" normalizeH="0" baseline="0" noProof="0" dirty="0">
+                <a:ln>
+                  <a:noFill/>
+                </a:ln>
+                <a:solidFill>
+                  <a:srgbClr val="1B2A4A"/>
+                </a:solidFill>
+                <a:effectLst/>
+                <a:uLnTx/>
+                <a:uFillTx/>
+                <a:latin typeface="Calibri" pitchFamily="34" charset="0"/>
+                <a:ea typeface="Calibri" pitchFamily="34" charset="-122"/>
+                <a:cs typeface="Calibri" pitchFamily="34" charset="-120"/>
+              </a:rPr>
+              <a:t>Priority Based Scheduling - Pseudocode</a:t>
+            </a:r>
+            <a:endParaRPr kumimoji="0" lang="en-US" sz="2200" b="0" i="0" u="none" strike="noStrike" kern="1200" cap="none" spc="0" normalizeH="0" baseline="0" noProof="0" dirty="0">
+              <a:ln>
+                <a:noFill/>
+              </a:ln>
+              <a:solidFill>
+                <a:prstClr val="black"/>
+              </a:solidFill>
+              <a:effectLst/>
+              <a:uLnTx/>
+              <a:uFillTx/>
+              <a:latin typeface="Calibri" panose="020F0502020204030204"/>
+              <a:ea typeface="+mn-ea"/>
+              <a:cs typeface="+mn-cs"/>
+            </a:endParaRPr>
+          </a:p>
+        </p:txBody>
+      </p:sp>
+      <p:sp>
+        <p:nvSpPr>
+          <p:cNvPr id="6" name="Shape 3">
+            <a:extLst>
+              <a:ext uri="{FF2B5EF4-FFF2-40B4-BE49-F238E27FC236}">
+                <a16:creationId xmlns:a16="http://schemas.microsoft.com/office/drawing/2014/main" id="{24E7FDB0-9383-353D-FA86-D4B2C348E5FF}"/>
+              </a:ext>
+            </a:extLst>
+          </p:cNvPr>
+          <p:cNvSpPr/>
+          <p:nvPr/>
+        </p:nvSpPr>
+        <p:spPr>
+          <a:xfrm>
+            <a:off x="380455" y="868680"/>
+            <a:ext cx="4718142" cy="3977640"/>
+          </a:xfrm>
+          <a:prstGeom prst="rect">
+            <a:avLst/>
+          </a:prstGeom>
+          <a:solidFill>
+            <a:srgbClr val="F4F6FA"/>
+          </a:solidFill>
+          <a:ln w="12700">
+            <a:solidFill>
+              <a:srgbClr val="E5E7EB"/>
+            </a:solidFill>
+            <a:prstDash val="solid"/>
+          </a:ln>
+          <a:effectLst>
+            <a:outerShdw blurRad="63500" dist="25400" dir="8100000" algn="bl" rotWithShape="0">
+              <a:srgbClr val="000000">
+                <a:alpha val="10000"/>
+              </a:srgbClr>
+            </a:outerShdw>
+          </a:effectLst>
+        </p:spPr>
+        <p:txBody>
+          <a:bodyPr anchor="ctr"/>
+          <a:lstStyle/>
+          <a:p>
+            <a:pPr marL="285750" indent="-285750">
+              <a:buFont typeface="Arial" panose="020B0604020202020204" pitchFamily="34" charset="0"/>
+              <a:buChar char="•"/>
+            </a:pPr>
+            <a:r>
+              <a:rPr lang="en-US" dirty="0"/>
+              <a:t>Initialize</a:t>
+            </a:r>
+            <a:r>
+              <a:rPr lang="en-US" i="1" dirty="0">
+                <a:solidFill>
+                  <a:srgbClr val="00B050"/>
+                </a:solidFill>
+              </a:rPr>
+              <a:t> </a:t>
+            </a:r>
+            <a:r>
+              <a:rPr lang="en-US" i="1" dirty="0" err="1">
+                <a:solidFill>
+                  <a:srgbClr val="00B050"/>
+                </a:solidFill>
+              </a:rPr>
+              <a:t>highprproc</a:t>
+            </a:r>
+            <a:r>
+              <a:rPr lang="en-US" dirty="0"/>
+              <a:t> with 0 and </a:t>
+            </a:r>
+            <a:r>
+              <a:rPr lang="en-US" i="1" dirty="0" err="1">
+                <a:solidFill>
+                  <a:srgbClr val="00B050"/>
+                </a:solidFill>
+              </a:rPr>
+              <a:t>highestpr</a:t>
+            </a:r>
+            <a:r>
+              <a:rPr lang="en-US" dirty="0"/>
+              <a:t> with 11 (lowest than the lowest value) </a:t>
+            </a:r>
+          </a:p>
+          <a:p>
+            <a:pPr marL="285750" indent="-285750">
+              <a:buFont typeface="Arial" panose="020B0604020202020204" pitchFamily="34" charset="0"/>
+              <a:buChar char="•"/>
+            </a:pPr>
+            <a:r>
+              <a:rPr lang="en-US" dirty="0"/>
+              <a:t>Iterate through the </a:t>
+            </a:r>
+            <a:r>
+              <a:rPr lang="en-US" i="1" dirty="0" err="1"/>
+              <a:t>ptable</a:t>
+            </a:r>
+            <a:r>
+              <a:rPr lang="en-US" dirty="0"/>
+              <a:t> circularly from </a:t>
+            </a:r>
+            <a:r>
+              <a:rPr lang="en-US" i="1" dirty="0">
+                <a:solidFill>
+                  <a:srgbClr val="00B050"/>
+                </a:solidFill>
+              </a:rPr>
+              <a:t>last</a:t>
+            </a:r>
+          </a:p>
+          <a:p>
+            <a:pPr marL="742950" lvl="1" indent="-285750">
+              <a:buFont typeface="Arial" panose="020B0604020202020204" pitchFamily="34" charset="0"/>
+              <a:buChar char="•"/>
+            </a:pPr>
+            <a:r>
+              <a:rPr lang="en-US" dirty="0"/>
+              <a:t>If you find a </a:t>
+            </a:r>
+            <a:r>
+              <a:rPr lang="en-US" i="1" dirty="0"/>
+              <a:t>runnable</a:t>
+            </a:r>
+            <a:r>
+              <a:rPr lang="en-US" dirty="0"/>
+              <a:t> process with higher priority</a:t>
+            </a:r>
+          </a:p>
+          <a:p>
+            <a:pPr marL="1200150" lvl="2" indent="-285750">
+              <a:buFont typeface="Arial" panose="020B0604020202020204" pitchFamily="34" charset="0"/>
+              <a:buChar char="•"/>
+            </a:pPr>
+            <a:r>
+              <a:rPr lang="en-US" dirty="0"/>
+              <a:t>Update </a:t>
+            </a:r>
+            <a:r>
+              <a:rPr lang="en-US" i="1" dirty="0" err="1">
+                <a:solidFill>
+                  <a:srgbClr val="00B050"/>
+                </a:solidFill>
+              </a:rPr>
+              <a:t>highespr</a:t>
+            </a:r>
+            <a:r>
+              <a:rPr lang="en-US" dirty="0"/>
+              <a:t> and </a:t>
+            </a:r>
+            <a:r>
+              <a:rPr lang="en-US" i="1" dirty="0" err="1">
+                <a:solidFill>
+                  <a:srgbClr val="00B050"/>
+                </a:solidFill>
+              </a:rPr>
+              <a:t>highprproc</a:t>
+            </a:r>
+            <a:endParaRPr lang="en-US" dirty="0"/>
+          </a:p>
+          <a:p>
+            <a:pPr marL="285750" indent="-285750">
+              <a:buFont typeface="Arial" panose="020B0604020202020204" pitchFamily="34" charset="0"/>
+              <a:buChar char="•"/>
+            </a:pPr>
+            <a:r>
+              <a:rPr lang="en-US" dirty="0"/>
+              <a:t>If </a:t>
+            </a:r>
+            <a:r>
+              <a:rPr lang="en-US" i="1" dirty="0" err="1">
+                <a:solidFill>
+                  <a:srgbClr val="00B050"/>
+                </a:solidFill>
+              </a:rPr>
+              <a:t>highprproc</a:t>
+            </a:r>
+            <a:r>
+              <a:rPr lang="en-US" dirty="0"/>
+              <a:t> was updated</a:t>
+            </a:r>
+          </a:p>
+          <a:p>
+            <a:pPr marL="742950" lvl="1" indent="-285750">
+              <a:buFont typeface="Arial" panose="020B0604020202020204" pitchFamily="34" charset="0"/>
+              <a:buChar char="•"/>
+            </a:pPr>
+            <a:r>
+              <a:rPr lang="en-US" dirty="0"/>
+              <a:t>Update </a:t>
+            </a:r>
+            <a:r>
+              <a:rPr lang="en-US" i="1" dirty="0">
+                <a:solidFill>
+                  <a:srgbClr val="00B050"/>
+                </a:solidFill>
+              </a:rPr>
+              <a:t>last</a:t>
+            </a:r>
+            <a:r>
+              <a:rPr lang="en-US" dirty="0"/>
+              <a:t> to point to the next </a:t>
+            </a:r>
+            <a:r>
+              <a:rPr lang="en-US" dirty="0" err="1"/>
+              <a:t>pcb</a:t>
+            </a:r>
+            <a:endParaRPr lang="en-US" dirty="0"/>
+          </a:p>
+          <a:p>
+            <a:pPr marL="742950" lvl="1" indent="-285750">
+              <a:buFont typeface="Arial" panose="020B0604020202020204" pitchFamily="34" charset="0"/>
+              <a:buChar char="•"/>
+            </a:pPr>
+            <a:r>
+              <a:rPr lang="en-US" dirty="0"/>
+              <a:t>Update current process to </a:t>
+            </a:r>
+            <a:r>
+              <a:rPr lang="en-US" i="1" dirty="0" err="1">
+                <a:solidFill>
+                  <a:srgbClr val="00B050"/>
+                </a:solidFill>
+              </a:rPr>
+              <a:t>highprproc</a:t>
+            </a:r>
+            <a:r>
+              <a:rPr lang="en-US" dirty="0"/>
+              <a:t> and change context to it</a:t>
+            </a:r>
+          </a:p>
+        </p:txBody>
+      </p:sp>
+      <p:sp>
+        <p:nvSpPr>
+          <p:cNvPr id="7" name="TextBox 6">
+            <a:extLst>
+              <a:ext uri="{FF2B5EF4-FFF2-40B4-BE49-F238E27FC236}">
+                <a16:creationId xmlns:a16="http://schemas.microsoft.com/office/drawing/2014/main" id="{F29958F0-73A6-7808-4E56-9A8BD10E21FA}"/>
+              </a:ext>
+            </a:extLst>
+          </p:cNvPr>
+          <p:cNvSpPr txBox="1"/>
+          <p:nvPr/>
+        </p:nvSpPr>
+        <p:spPr>
+          <a:xfrm>
+            <a:off x="5401442" y="954323"/>
+            <a:ext cx="3541390" cy="2862322"/>
+          </a:xfrm>
+          <a:prstGeom prst="rect">
+            <a:avLst/>
+          </a:prstGeom>
+          <a:noFill/>
+        </p:spPr>
+        <p:txBody>
+          <a:bodyPr wrap="square" rtlCol="0">
+            <a:spAutoFit/>
+          </a:bodyPr>
+          <a:lstStyle/>
+          <a:p>
+            <a:r>
+              <a:rPr lang="en-US" u="sng" dirty="0"/>
+              <a:t>Note</a:t>
+            </a:r>
+          </a:p>
+          <a:p>
+            <a:r>
+              <a:rPr lang="en-US" b="1" dirty="0"/>
+              <a:t>Role of </a:t>
+            </a:r>
+            <a:r>
+              <a:rPr lang="en-US" b="1" i="1" dirty="0">
+                <a:solidFill>
+                  <a:srgbClr val="00B050"/>
+                </a:solidFill>
+              </a:rPr>
+              <a:t>last</a:t>
+            </a:r>
+            <a:r>
+              <a:rPr lang="en-US" b="1" dirty="0"/>
+              <a:t>:</a:t>
+            </a:r>
+          </a:p>
+          <a:p>
+            <a:r>
+              <a:rPr lang="en-US" dirty="0"/>
+              <a:t>If we start iterating from the beginning of the </a:t>
+            </a:r>
+            <a:r>
+              <a:rPr lang="en-US" dirty="0" err="1"/>
+              <a:t>ptable</a:t>
+            </a:r>
+            <a:r>
+              <a:rPr lang="en-US" dirty="0"/>
+              <a:t> each time, we won’t iterate </a:t>
+            </a:r>
+            <a:r>
+              <a:rPr lang="en-US" dirty="0" err="1"/>
+              <a:t>iterate</a:t>
+            </a:r>
+            <a:r>
+              <a:rPr lang="en-US" dirty="0"/>
+              <a:t> through different processes with the same priority, however this way we implement a Round Robin technique within processes of the same priority</a:t>
+            </a:r>
+          </a:p>
+        </p:txBody>
+      </p:sp>
+    </p:spTree>
+    <p:extLst>
+      <p:ext uri="{BB962C8B-B14F-4D97-AF65-F5344CB8AC3E}">
+        <p14:creationId xmlns:p14="http://schemas.microsoft.com/office/powerpoint/2010/main" val="2902513876"/>
+      </p:ext>
+    </p:extLst>
+  </p:cSld>
+  <p:clrMapOvr>
+    <a:masterClrMapping/>
+  </p:clrMapOvr>
+</p:sld>
+</file>
+
+<file path=ppt/slides/slide15.xml><?xml version="1.0" encoding="utf-8"?>
+<p:sld xmlns:a="http://schemas.openxmlformats.org/drawingml/2006/main" xmlns:r="http://schemas.openxmlformats.org/officeDocument/2006/relationships" xmlns:p="http://schemas.openxmlformats.org/presentationml/2006/main">
+  <p:cSld>
+    <p:bg>
+      <p:bgPr>
+        <a:solidFill>
+          <a:srgbClr val="FFFFFF"/>
+        </a:solidFill>
+        <a:effectLst/>
+      </p:bgPr>
+    </p:bg>
+    <p:spTree>
+      <p:nvGrpSpPr>
+        <p:cNvPr id="1" name="">
+          <a:extLst>
+            <a:ext uri="{FF2B5EF4-FFF2-40B4-BE49-F238E27FC236}">
+              <a16:creationId xmlns:a16="http://schemas.microsoft.com/office/drawing/2014/main" id="{BB3472E2-E59B-8B3E-8DF9-EC5C836AFAAA}"/>
+            </a:ext>
+          </a:extLst>
+        </p:cNvPr>
+        <p:cNvGrpSpPr/>
+        <p:nvPr/>
+      </p:nvGrpSpPr>
+      <p:grpSpPr>
+        <a:xfrm>
+          <a:off x="0" y="0"/>
+          <a:ext cx="0" cy="0"/>
+          <a:chOff x="0" y="0"/>
+          <a:chExt cx="0" cy="0"/>
+        </a:xfrm>
+      </p:grpSpPr>
+      <p:sp>
+        <p:nvSpPr>
+          <p:cNvPr id="2" name="Shape 0">
+            <a:extLst>
+              <a:ext uri="{FF2B5EF4-FFF2-40B4-BE49-F238E27FC236}">
+                <a16:creationId xmlns:a16="http://schemas.microsoft.com/office/drawing/2014/main" id="{74F39EB4-4532-DEE7-02B7-971B7A9711D2}"/>
+              </a:ext>
+            </a:extLst>
+          </p:cNvPr>
+          <p:cNvSpPr/>
+          <p:nvPr/>
+        </p:nvSpPr>
+        <p:spPr>
+          <a:xfrm>
+            <a:off x="0" y="0"/>
+            <a:ext cx="164592" cy="5143500"/>
+          </a:xfrm>
+          <a:prstGeom prst="rect">
+            <a:avLst/>
+          </a:prstGeom>
+          <a:solidFill>
+            <a:srgbClr val="1B2A4A"/>
+          </a:solidFill>
+          <a:ln w="12700">
+            <a:solidFill>
+              <a:srgbClr val="1B2A4A"/>
+            </a:solidFill>
+            <a:prstDash val="solid"/>
+          </a:ln>
+        </p:spPr>
+        <p:txBody>
+          <a:bodyPr/>
+          <a:lstStyle/>
+          <a:p>
+            <a:pPr marL="0" marR="0" lvl="0" indent="0" algn="l" defTabSz="914400" rtl="0" eaLnBrk="1" fontAlgn="auto" latinLnBrk="0" hangingPunct="1">
+              <a:lnSpc>
+                <a:spcPct val="100000"/>
+              </a:lnSpc>
+              <a:spcBef>
+                <a:spcPts val="0"/>
+              </a:spcBef>
+              <a:spcAft>
+                <a:spcPts val="0"/>
+              </a:spcAft>
+              <a:buClrTx/>
+              <a:buSzTx/>
+              <a:buFontTx/>
+              <a:buNone/>
+              <a:tabLst/>
+              <a:defRPr/>
+            </a:pPr>
+            <a:endParaRPr kumimoji="0" lang="en-US" sz="1800" b="0" i="0" u="none" strike="noStrike" kern="1200" cap="none" spc="0" normalizeH="0" baseline="0" noProof="0">
+              <a:ln>
+                <a:noFill/>
+              </a:ln>
+              <a:solidFill>
+                <a:prstClr val="black"/>
+              </a:solidFill>
+              <a:effectLst/>
+              <a:uLnTx/>
+              <a:uFillTx/>
+              <a:latin typeface="Calibri" panose="020F0502020204030204"/>
+              <a:ea typeface="+mn-ea"/>
+              <a:cs typeface="+mn-cs"/>
+            </a:endParaRPr>
+          </a:p>
+        </p:txBody>
+      </p:sp>
+      <p:sp>
+        <p:nvSpPr>
+          <p:cNvPr id="3" name="Shape 1">
+            <a:extLst>
+              <a:ext uri="{FF2B5EF4-FFF2-40B4-BE49-F238E27FC236}">
+                <a16:creationId xmlns:a16="http://schemas.microsoft.com/office/drawing/2014/main" id="{E299ED55-581C-3842-1676-50C127536D54}"/>
+              </a:ext>
+            </a:extLst>
+          </p:cNvPr>
+          <p:cNvSpPr/>
+          <p:nvPr/>
+        </p:nvSpPr>
+        <p:spPr>
+          <a:xfrm>
+            <a:off x="164592" y="0"/>
+            <a:ext cx="8979408" cy="713232"/>
+          </a:xfrm>
+          <a:prstGeom prst="rect">
+            <a:avLst/>
+          </a:prstGeom>
+          <a:solidFill>
+            <a:srgbClr val="F4F6FA"/>
+          </a:solidFill>
+          <a:ln w="12700">
+            <a:solidFill>
+              <a:srgbClr val="F4F6FA"/>
+            </a:solidFill>
+            <a:prstDash val="solid"/>
+          </a:ln>
+        </p:spPr>
+        <p:txBody>
+          <a:bodyPr/>
+          <a:lstStyle/>
+          <a:p>
+            <a:pPr marL="0" marR="0" lvl="0" indent="0" algn="l" defTabSz="914400" rtl="0" eaLnBrk="1" fontAlgn="auto" latinLnBrk="0" hangingPunct="1">
+              <a:lnSpc>
+                <a:spcPct val="100000"/>
+              </a:lnSpc>
+              <a:spcBef>
+                <a:spcPts val="0"/>
+              </a:spcBef>
+              <a:spcAft>
+                <a:spcPts val="0"/>
+              </a:spcAft>
+              <a:buClrTx/>
+              <a:buSzTx/>
+              <a:buFontTx/>
+              <a:buNone/>
+              <a:tabLst/>
+              <a:defRPr/>
+            </a:pPr>
+            <a:endParaRPr kumimoji="0" lang="en-US" sz="1800" b="0" i="0" u="none" strike="noStrike" kern="1200" cap="none" spc="0" normalizeH="0" baseline="0" noProof="0">
+              <a:ln>
+                <a:noFill/>
+              </a:ln>
+              <a:solidFill>
+                <a:prstClr val="black"/>
+              </a:solidFill>
+              <a:effectLst/>
+              <a:uLnTx/>
+              <a:uFillTx/>
+              <a:latin typeface="Calibri" panose="020F0502020204030204"/>
+              <a:ea typeface="+mn-ea"/>
+              <a:cs typeface="+mn-cs"/>
+            </a:endParaRPr>
+          </a:p>
+        </p:txBody>
+      </p:sp>
+      <p:sp>
+        <p:nvSpPr>
+          <p:cNvPr id="4" name="Text 2">
+            <a:extLst>
+              <a:ext uri="{FF2B5EF4-FFF2-40B4-BE49-F238E27FC236}">
+                <a16:creationId xmlns:a16="http://schemas.microsoft.com/office/drawing/2014/main" id="{3DB8A46A-15F8-2F25-CB30-853D5D922917}"/>
+              </a:ext>
+            </a:extLst>
+          </p:cNvPr>
+          <p:cNvSpPr/>
+          <p:nvPr/>
+        </p:nvSpPr>
+        <p:spPr>
+          <a:xfrm>
+            <a:off x="347472" y="0"/>
+            <a:ext cx="8595360" cy="713232"/>
+          </a:xfrm>
+          <a:prstGeom prst="rect">
+            <a:avLst/>
+          </a:prstGeom>
+          <a:noFill/>
+          <a:ln/>
+        </p:spPr>
+        <p:txBody>
+          <a:bodyPr wrap="square" lIns="0" tIns="0" rIns="0" bIns="0" rtlCol="0" anchor="ctr"/>
+          <a:lstStyle/>
+          <a:p>
+            <a:pPr lvl="0">
+              <a:defRPr/>
+            </a:pPr>
+            <a:r>
+              <a:rPr lang="en-US" sz="2200" b="1" dirty="0">
+                <a:solidFill>
+                  <a:srgbClr val="1B2A4A"/>
+                </a:solidFill>
+                <a:latin typeface="Calibri" pitchFamily="34" charset="0"/>
+                <a:ea typeface="Calibri" pitchFamily="34" charset="-122"/>
+                <a:cs typeface="Calibri" pitchFamily="34" charset="-120"/>
+              </a:rPr>
+              <a:t>Priority Based Scheduling </a:t>
+            </a:r>
+            <a:r>
+              <a:rPr lang="en-US" sz="2200" b="1" i="1" dirty="0">
+                <a:solidFill>
+                  <a:srgbClr val="1B2A4A"/>
+                </a:solidFill>
+                <a:latin typeface="Calibri" pitchFamily="34" charset="0"/>
+                <a:ea typeface="Calibri" pitchFamily="34" charset="-122"/>
+                <a:cs typeface="Calibri" pitchFamily="34" charset="-120"/>
+              </a:rPr>
+              <a:t>with Decay </a:t>
+            </a:r>
+            <a:r>
+              <a:rPr lang="en-US" sz="2200" b="1" dirty="0">
+                <a:solidFill>
+                  <a:srgbClr val="1B2A4A"/>
+                </a:solidFill>
+                <a:latin typeface="Calibri" pitchFamily="34" charset="0"/>
+                <a:ea typeface="Calibri" pitchFamily="34" charset="-122"/>
+                <a:cs typeface="Calibri" pitchFamily="34" charset="-120"/>
+              </a:rPr>
+              <a:t>- Pseudocode</a:t>
+            </a:r>
+            <a:endParaRPr lang="en-US" sz="2200" dirty="0">
+              <a:solidFill>
+                <a:prstClr val="black"/>
+              </a:solidFill>
+            </a:endParaRPr>
+          </a:p>
+        </p:txBody>
+      </p:sp>
+      <p:sp>
+        <p:nvSpPr>
+          <p:cNvPr id="6" name="Shape 3">
+            <a:extLst>
+              <a:ext uri="{FF2B5EF4-FFF2-40B4-BE49-F238E27FC236}">
+                <a16:creationId xmlns:a16="http://schemas.microsoft.com/office/drawing/2014/main" id="{C9150E08-D2DC-4C24-ABCB-4B57A10E94BC}"/>
+              </a:ext>
+            </a:extLst>
+          </p:cNvPr>
+          <p:cNvSpPr/>
+          <p:nvPr/>
+        </p:nvSpPr>
+        <p:spPr>
+          <a:xfrm>
+            <a:off x="380455" y="868680"/>
+            <a:ext cx="4718142" cy="3977640"/>
+          </a:xfrm>
+          <a:prstGeom prst="rect">
+            <a:avLst/>
+          </a:prstGeom>
+          <a:solidFill>
+            <a:srgbClr val="F4F6FA"/>
+          </a:solidFill>
+          <a:ln w="12700">
+            <a:solidFill>
+              <a:srgbClr val="E5E7EB"/>
+            </a:solidFill>
+            <a:prstDash val="solid"/>
+          </a:ln>
+          <a:effectLst>
+            <a:outerShdw blurRad="63500" dist="25400" dir="8100000" algn="bl" rotWithShape="0">
+              <a:srgbClr val="000000">
+                <a:alpha val="10000"/>
+              </a:srgbClr>
+            </a:outerShdw>
+          </a:effectLst>
+        </p:spPr>
+        <p:txBody>
+          <a:bodyPr anchor="ctr"/>
+          <a:lstStyle/>
+          <a:p>
+            <a:pPr marL="285750" indent="-285750">
+              <a:buFont typeface="Arial" panose="020B0604020202020204" pitchFamily="34" charset="0"/>
+              <a:buChar char="•"/>
+            </a:pPr>
+            <a:r>
+              <a:rPr lang="en-US" dirty="0"/>
+              <a:t>Initialize</a:t>
+            </a:r>
+            <a:r>
+              <a:rPr lang="en-US" i="1" dirty="0">
+                <a:solidFill>
+                  <a:srgbClr val="00B050"/>
+                </a:solidFill>
+              </a:rPr>
+              <a:t> </a:t>
+            </a:r>
+            <a:r>
+              <a:rPr lang="en-US" i="1" dirty="0" err="1">
+                <a:solidFill>
+                  <a:srgbClr val="00B050"/>
+                </a:solidFill>
+              </a:rPr>
+              <a:t>highprproc</a:t>
+            </a:r>
+            <a:r>
+              <a:rPr lang="en-US" dirty="0"/>
+              <a:t> with 0 and </a:t>
+            </a:r>
+            <a:r>
+              <a:rPr lang="en-US" i="1" dirty="0" err="1">
+                <a:solidFill>
+                  <a:srgbClr val="00B050"/>
+                </a:solidFill>
+              </a:rPr>
+              <a:t>highestpr</a:t>
+            </a:r>
+            <a:r>
+              <a:rPr lang="en-US" dirty="0"/>
+              <a:t> with 11 (lowest than the lowest value) </a:t>
+            </a:r>
+          </a:p>
+          <a:p>
+            <a:pPr marL="285750" indent="-285750">
+              <a:buFont typeface="Arial" panose="020B0604020202020204" pitchFamily="34" charset="0"/>
+              <a:buChar char="•"/>
+            </a:pPr>
+            <a:r>
+              <a:rPr lang="en-US" dirty="0"/>
+              <a:t>Iterate through the </a:t>
+            </a:r>
+            <a:r>
+              <a:rPr lang="en-US" i="1" dirty="0" err="1"/>
+              <a:t>ptable</a:t>
+            </a:r>
+            <a:r>
+              <a:rPr lang="en-US" dirty="0"/>
+              <a:t> circularly from </a:t>
+            </a:r>
+            <a:r>
+              <a:rPr lang="en-US" i="1" dirty="0">
+                <a:solidFill>
+                  <a:srgbClr val="00B050"/>
+                </a:solidFill>
+              </a:rPr>
+              <a:t>last</a:t>
+            </a:r>
+          </a:p>
+          <a:p>
+            <a:pPr marL="742950" lvl="1" indent="-285750">
+              <a:buFont typeface="Arial" panose="020B0604020202020204" pitchFamily="34" charset="0"/>
+              <a:buChar char="•"/>
+            </a:pPr>
+            <a:r>
+              <a:rPr lang="en-US" dirty="0"/>
+              <a:t>If you find a </a:t>
+            </a:r>
+            <a:r>
+              <a:rPr lang="en-US" i="1" dirty="0"/>
+              <a:t>runnable</a:t>
+            </a:r>
+            <a:r>
+              <a:rPr lang="en-US" dirty="0"/>
+              <a:t> process with higher priority</a:t>
+            </a:r>
+          </a:p>
+          <a:p>
+            <a:pPr marL="1200150" lvl="2" indent="-285750">
+              <a:buFont typeface="Arial" panose="020B0604020202020204" pitchFamily="34" charset="0"/>
+              <a:buChar char="•"/>
+            </a:pPr>
+            <a:r>
+              <a:rPr lang="en-US" dirty="0"/>
+              <a:t>Update </a:t>
+            </a:r>
+            <a:r>
+              <a:rPr lang="en-US" i="1" dirty="0" err="1">
+                <a:solidFill>
+                  <a:srgbClr val="00B050"/>
+                </a:solidFill>
+              </a:rPr>
+              <a:t>highespr</a:t>
+            </a:r>
+            <a:r>
+              <a:rPr lang="en-US" dirty="0"/>
+              <a:t> and </a:t>
+            </a:r>
+            <a:r>
+              <a:rPr lang="en-US" i="1" dirty="0" err="1">
+                <a:solidFill>
+                  <a:srgbClr val="00B050"/>
+                </a:solidFill>
+              </a:rPr>
+              <a:t>highprproc</a:t>
+            </a:r>
+            <a:endParaRPr lang="en-US" dirty="0"/>
+          </a:p>
+          <a:p>
+            <a:pPr marL="285750" indent="-285750">
+              <a:buFont typeface="Arial" panose="020B0604020202020204" pitchFamily="34" charset="0"/>
+              <a:buChar char="•"/>
+            </a:pPr>
+            <a:r>
+              <a:rPr lang="en-US" dirty="0"/>
+              <a:t>If </a:t>
+            </a:r>
+            <a:r>
+              <a:rPr lang="en-US" i="1" dirty="0" err="1">
+                <a:solidFill>
+                  <a:srgbClr val="00B050"/>
+                </a:solidFill>
+              </a:rPr>
+              <a:t>highprproc</a:t>
+            </a:r>
+            <a:r>
+              <a:rPr lang="en-US" dirty="0"/>
+              <a:t> was updated</a:t>
+            </a:r>
+          </a:p>
+          <a:p>
+            <a:pPr marL="742950" lvl="1" indent="-285750">
+              <a:buFont typeface="Arial" panose="020B0604020202020204" pitchFamily="34" charset="0"/>
+              <a:buChar char="•"/>
+            </a:pPr>
+            <a:r>
+              <a:rPr lang="en-US" dirty="0"/>
+              <a:t>Update </a:t>
+            </a:r>
+            <a:r>
+              <a:rPr lang="en-US" i="1" dirty="0">
+                <a:solidFill>
+                  <a:srgbClr val="00B050"/>
+                </a:solidFill>
+              </a:rPr>
+              <a:t>last</a:t>
+            </a:r>
+            <a:r>
+              <a:rPr lang="en-US" dirty="0"/>
+              <a:t> to point to the next </a:t>
+            </a:r>
+            <a:r>
+              <a:rPr lang="en-US" dirty="0" err="1"/>
+              <a:t>pcb</a:t>
+            </a:r>
+            <a:endParaRPr lang="en-US" dirty="0"/>
+          </a:p>
+          <a:p>
+            <a:pPr marL="742950" lvl="1" indent="-285750">
+              <a:buFont typeface="Arial" panose="020B0604020202020204" pitchFamily="34" charset="0"/>
+              <a:buChar char="•"/>
+            </a:pPr>
+            <a:r>
+              <a:rPr lang="en-US" dirty="0"/>
+              <a:t>Update current process to </a:t>
+            </a:r>
+            <a:r>
+              <a:rPr lang="en-US" i="1" dirty="0" err="1">
+                <a:solidFill>
+                  <a:srgbClr val="00B050"/>
+                </a:solidFill>
+              </a:rPr>
+              <a:t>highprproc</a:t>
+            </a:r>
+            <a:r>
+              <a:rPr lang="en-US" dirty="0"/>
+              <a:t> and change context to it</a:t>
+            </a:r>
+          </a:p>
+          <a:p>
+            <a:pPr marL="742950" lvl="1" indent="-285750">
+              <a:buFont typeface="Arial" panose="020B0604020202020204" pitchFamily="34" charset="0"/>
+              <a:buChar char="•"/>
+            </a:pPr>
+            <a:r>
+              <a:rPr lang="en-US" b="1" dirty="0"/>
+              <a:t>Update the priority of </a:t>
+            </a:r>
+            <a:r>
+              <a:rPr lang="en-US" b="1" i="1" dirty="0" err="1">
+                <a:solidFill>
+                  <a:srgbClr val="00B050"/>
+                </a:solidFill>
+              </a:rPr>
+              <a:t>highprproc</a:t>
+            </a:r>
+            <a:r>
+              <a:rPr lang="en-US" b="1" i="1" dirty="0">
+                <a:solidFill>
+                  <a:srgbClr val="00B050"/>
+                </a:solidFill>
+              </a:rPr>
+              <a:t> </a:t>
+            </a:r>
+            <a:r>
+              <a:rPr lang="en-US" b="1" dirty="0"/>
+              <a:t>according to </a:t>
+            </a:r>
+            <a:r>
+              <a:rPr lang="en-US" b="1" i="1" dirty="0" err="1">
+                <a:solidFill>
+                  <a:srgbClr val="00B050"/>
+                </a:solidFill>
+              </a:rPr>
+              <a:t>max_priority</a:t>
+            </a:r>
+            <a:r>
+              <a:rPr lang="en-US" b="1" i="1" dirty="0">
+                <a:solidFill>
+                  <a:srgbClr val="00B050"/>
+                </a:solidFill>
+              </a:rPr>
+              <a:t> </a:t>
+            </a:r>
+            <a:r>
+              <a:rPr lang="en-US" b="1" dirty="0"/>
+              <a:t>and its current priority</a:t>
+            </a:r>
+          </a:p>
+        </p:txBody>
+      </p:sp>
+      <p:sp>
+        <p:nvSpPr>
+          <p:cNvPr id="9" name="TextBox 8">
+            <a:extLst>
+              <a:ext uri="{FF2B5EF4-FFF2-40B4-BE49-F238E27FC236}">
+                <a16:creationId xmlns:a16="http://schemas.microsoft.com/office/drawing/2014/main" id="{FA7D43D8-AFAB-9619-0A0F-5A85BABEEA56}"/>
+              </a:ext>
+            </a:extLst>
+          </p:cNvPr>
+          <p:cNvSpPr txBox="1"/>
+          <p:nvPr/>
+        </p:nvSpPr>
+        <p:spPr>
+          <a:xfrm>
+            <a:off x="5245403" y="1015068"/>
+            <a:ext cx="3518141" cy="3970318"/>
+          </a:xfrm>
+          <a:prstGeom prst="rect">
+            <a:avLst/>
+          </a:prstGeom>
+          <a:noFill/>
+        </p:spPr>
+        <p:txBody>
+          <a:bodyPr wrap="square" rtlCol="0">
+            <a:spAutoFit/>
+          </a:bodyPr>
+          <a:lstStyle/>
+          <a:p>
+            <a:pPr marL="285750" indent="-285750">
+              <a:buFont typeface="Arial" panose="020B0604020202020204" pitchFamily="34" charset="0"/>
+              <a:buChar char="•"/>
+            </a:pPr>
+            <a:r>
+              <a:rPr lang="en-US" b="1" dirty="0"/>
+              <a:t>How was the new priority set?</a:t>
+            </a:r>
+          </a:p>
+          <a:p>
+            <a:r>
+              <a:rPr lang="en-US" dirty="0"/>
+              <a:t>If priority is less than 5 (high):</a:t>
+            </a:r>
+          </a:p>
+          <a:p>
+            <a:r>
+              <a:rPr lang="en-US" dirty="0"/>
+              <a:t>It’s only incremented if ticks%2 = 0 (occasionally)</a:t>
+            </a:r>
+          </a:p>
+          <a:p>
+            <a:r>
+              <a:rPr lang="en-US" dirty="0"/>
+              <a:t>Otherwise (low priority) the priority is incremented regardless of ticks</a:t>
+            </a:r>
+          </a:p>
+          <a:p>
+            <a:r>
+              <a:rPr lang="en-US" dirty="0"/>
+              <a:t>In both cases, we won’t increment the priority if it already reached </a:t>
+            </a:r>
+            <a:r>
+              <a:rPr lang="en-US" dirty="0" err="1"/>
+              <a:t>max_priority</a:t>
+            </a:r>
+            <a:endParaRPr lang="en-US" dirty="0"/>
+          </a:p>
+          <a:p>
+            <a:pPr marL="285750" indent="-285750">
+              <a:buFont typeface="Arial" panose="020B0604020202020204" pitchFamily="34" charset="0"/>
+              <a:buChar char="•"/>
+            </a:pPr>
+            <a:r>
+              <a:rPr lang="en-US" b="1" dirty="0"/>
+              <a:t>How was </a:t>
+            </a:r>
+            <a:r>
+              <a:rPr lang="en-US" b="1" dirty="0" err="1"/>
+              <a:t>max_priority</a:t>
+            </a:r>
+            <a:r>
+              <a:rPr lang="en-US" b="1" dirty="0"/>
+              <a:t> set?</a:t>
+            </a:r>
+          </a:p>
+          <a:p>
+            <a:r>
+              <a:rPr lang="en-US" dirty="0"/>
+              <a:t>The default value is 10 (so priority would go from 5 to 10)</a:t>
+            </a:r>
+          </a:p>
+          <a:p>
+            <a:r>
+              <a:rPr lang="en-US" dirty="0"/>
+              <a:t>When </a:t>
+            </a:r>
+            <a:r>
+              <a:rPr lang="en-US" dirty="0" err="1"/>
+              <a:t>setpriority</a:t>
+            </a:r>
+            <a:r>
+              <a:rPr lang="en-US" dirty="0"/>
+              <a:t> is called, it is set to the new priority + 6</a:t>
+            </a:r>
+          </a:p>
+        </p:txBody>
+      </p:sp>
+    </p:spTree>
+    <p:extLst>
+      <p:ext uri="{BB962C8B-B14F-4D97-AF65-F5344CB8AC3E}">
+        <p14:creationId xmlns:p14="http://schemas.microsoft.com/office/powerpoint/2010/main" val="406425458"/>
+      </p:ext>
+    </p:extLst>
+  </p:cSld>
+  <p:clrMapOvr>
+    <a:masterClrMapping/>
+  </p:clrMapOvr>
+</p:sld>
+</file>
+
+<file path=ppt/slides/slide16.xml><?xml version="1.0" encoding="utf-8"?>
+<p:sld xmlns:a="http://schemas.openxmlformats.org/drawingml/2006/main" xmlns:r="http://schemas.openxmlformats.org/officeDocument/2006/relationships" xmlns:p="http://schemas.openxmlformats.org/presentationml/2006/main">
+  <p:cSld>
+    <p:bg>
+      <p:bgPr>
+        <a:solidFill>
+          <a:srgbClr val="FFFFFF"/>
+        </a:solidFill>
+        <a:effectLst/>
+      </p:bgPr>
+    </p:bg>
+    <p:spTree>
+      <p:nvGrpSpPr>
+        <p:cNvPr id="1" name="">
+          <a:extLst>
+            <a:ext uri="{FF2B5EF4-FFF2-40B4-BE49-F238E27FC236}">
+              <a16:creationId xmlns:a16="http://schemas.microsoft.com/office/drawing/2014/main" id="{15624855-3E46-2D0D-6AB9-845DDF85A907}"/>
+            </a:ext>
+          </a:extLst>
+        </p:cNvPr>
+        <p:cNvGrpSpPr/>
+        <p:nvPr/>
+      </p:nvGrpSpPr>
+      <p:grpSpPr>
+        <a:xfrm>
+          <a:off x="0" y="0"/>
+          <a:ext cx="0" cy="0"/>
+          <a:chOff x="0" y="0"/>
+          <a:chExt cx="0" cy="0"/>
+        </a:xfrm>
+      </p:grpSpPr>
+      <p:sp>
+        <p:nvSpPr>
+          <p:cNvPr id="2" name="Shape 0">
+            <a:extLst>
+              <a:ext uri="{FF2B5EF4-FFF2-40B4-BE49-F238E27FC236}">
+                <a16:creationId xmlns:a16="http://schemas.microsoft.com/office/drawing/2014/main" id="{8D15C673-BF6B-FD8D-1DB6-7AD8D8776128}"/>
+              </a:ext>
+            </a:extLst>
+          </p:cNvPr>
+          <p:cNvSpPr/>
+          <p:nvPr/>
+        </p:nvSpPr>
+        <p:spPr>
+          <a:xfrm>
+            <a:off x="0" y="0"/>
+            <a:ext cx="164592" cy="5143500"/>
+          </a:xfrm>
+          <a:prstGeom prst="rect">
+            <a:avLst/>
+          </a:prstGeom>
+          <a:solidFill>
+            <a:srgbClr val="1B2A4A"/>
+          </a:solidFill>
+          <a:ln w="12700">
+            <a:solidFill>
+              <a:srgbClr val="1B2A4A"/>
+            </a:solidFill>
+            <a:prstDash val="solid"/>
+          </a:ln>
+        </p:spPr>
+        <p:txBody>
+          <a:bodyPr/>
+          <a:lstStyle/>
+          <a:p>
+            <a:pPr marL="0" marR="0" lvl="0" indent="0" algn="l" defTabSz="914400" rtl="0" eaLnBrk="1" fontAlgn="auto" latinLnBrk="0" hangingPunct="1">
+              <a:lnSpc>
+                <a:spcPct val="100000"/>
+              </a:lnSpc>
+              <a:spcBef>
+                <a:spcPts val="0"/>
+              </a:spcBef>
+              <a:spcAft>
+                <a:spcPts val="0"/>
+              </a:spcAft>
+              <a:buClrTx/>
+              <a:buSzTx/>
+              <a:buFontTx/>
+              <a:buNone/>
+              <a:tabLst/>
+              <a:defRPr/>
+            </a:pPr>
+            <a:endParaRPr kumimoji="0" lang="en-US" sz="1800" b="0" i="0" u="none" strike="noStrike" kern="1200" cap="none" spc="0" normalizeH="0" baseline="0" noProof="0">
+              <a:ln>
+                <a:noFill/>
+              </a:ln>
+              <a:solidFill>
+                <a:prstClr val="black"/>
+              </a:solidFill>
+              <a:effectLst/>
+              <a:uLnTx/>
+              <a:uFillTx/>
+              <a:latin typeface="Calibri" panose="020F0502020204030204"/>
+              <a:ea typeface="+mn-ea"/>
+              <a:cs typeface="+mn-cs"/>
+            </a:endParaRPr>
+          </a:p>
+        </p:txBody>
+      </p:sp>
+      <p:sp>
+        <p:nvSpPr>
+          <p:cNvPr id="3" name="Shape 1">
+            <a:extLst>
+              <a:ext uri="{FF2B5EF4-FFF2-40B4-BE49-F238E27FC236}">
+                <a16:creationId xmlns:a16="http://schemas.microsoft.com/office/drawing/2014/main" id="{342F4616-844B-E1DB-ADD6-FF0B173FC888}"/>
+              </a:ext>
+            </a:extLst>
+          </p:cNvPr>
+          <p:cNvSpPr/>
+          <p:nvPr/>
+        </p:nvSpPr>
+        <p:spPr>
+          <a:xfrm>
+            <a:off x="164592" y="0"/>
+            <a:ext cx="8979408" cy="713232"/>
+          </a:xfrm>
+          <a:prstGeom prst="rect">
+            <a:avLst/>
+          </a:prstGeom>
+          <a:solidFill>
+            <a:srgbClr val="F4F6FA"/>
+          </a:solidFill>
+          <a:ln w="12700">
+            <a:solidFill>
+              <a:srgbClr val="F4F6FA"/>
+            </a:solidFill>
+            <a:prstDash val="solid"/>
+          </a:ln>
+        </p:spPr>
+        <p:txBody>
+          <a:bodyPr/>
+          <a:lstStyle/>
+          <a:p>
+            <a:pPr marL="0" marR="0" lvl="0" indent="0" algn="l" defTabSz="914400" rtl="0" eaLnBrk="1" fontAlgn="auto" latinLnBrk="0" hangingPunct="1">
+              <a:lnSpc>
+                <a:spcPct val="100000"/>
+              </a:lnSpc>
+              <a:spcBef>
+                <a:spcPts val="0"/>
+              </a:spcBef>
+              <a:spcAft>
+                <a:spcPts val="0"/>
+              </a:spcAft>
+              <a:buClrTx/>
+              <a:buSzTx/>
+              <a:buFontTx/>
+              <a:buNone/>
+              <a:tabLst/>
+              <a:defRPr/>
+            </a:pPr>
+            <a:endParaRPr kumimoji="0" lang="en-US" sz="1800" b="0" i="0" u="none" strike="noStrike" kern="1200" cap="none" spc="0" normalizeH="0" baseline="0" noProof="0">
+              <a:ln>
+                <a:noFill/>
+              </a:ln>
+              <a:solidFill>
+                <a:prstClr val="black"/>
+              </a:solidFill>
+              <a:effectLst/>
+              <a:uLnTx/>
+              <a:uFillTx/>
+              <a:latin typeface="Calibri" panose="020F0502020204030204"/>
+              <a:ea typeface="+mn-ea"/>
+              <a:cs typeface="+mn-cs"/>
+            </a:endParaRPr>
+          </a:p>
+        </p:txBody>
+      </p:sp>
+      <p:sp>
+        <p:nvSpPr>
+          <p:cNvPr id="4" name="Text 2">
+            <a:extLst>
+              <a:ext uri="{FF2B5EF4-FFF2-40B4-BE49-F238E27FC236}">
+                <a16:creationId xmlns:a16="http://schemas.microsoft.com/office/drawing/2014/main" id="{2FA7A93E-B7E0-8D90-ABCE-7CAC3ADDA806}"/>
+              </a:ext>
+            </a:extLst>
+          </p:cNvPr>
+          <p:cNvSpPr/>
+          <p:nvPr/>
+        </p:nvSpPr>
+        <p:spPr>
+          <a:xfrm>
+            <a:off x="347472" y="0"/>
+            <a:ext cx="8595360" cy="713232"/>
+          </a:xfrm>
+          <a:prstGeom prst="rect">
+            <a:avLst/>
+          </a:prstGeom>
+          <a:noFill/>
+          <a:ln/>
+        </p:spPr>
+        <p:txBody>
+          <a:bodyPr wrap="square" lIns="0" tIns="0" rIns="0" bIns="0" rtlCol="0" anchor="ctr"/>
+          <a:lstStyle/>
+          <a:p>
+            <a:pPr marL="0" marR="0" lvl="0" indent="0" algn="l" defTabSz="914400" rtl="0" eaLnBrk="1" fontAlgn="auto" latinLnBrk="0" hangingPunct="1">
+              <a:lnSpc>
+                <a:spcPct val="100000"/>
+              </a:lnSpc>
+              <a:spcBef>
+                <a:spcPts val="0"/>
+              </a:spcBef>
+              <a:spcAft>
+                <a:spcPts val="0"/>
+              </a:spcAft>
+              <a:buClrTx/>
+              <a:buSzTx/>
+              <a:buFontTx/>
+              <a:buNone/>
+              <a:tabLst/>
+              <a:defRPr/>
+            </a:pPr>
+            <a:r>
+              <a:rPr kumimoji="0" lang="en-US" sz="2200" b="1" i="0" u="none" strike="noStrike" kern="1200" cap="none" spc="0" normalizeH="0" baseline="0" noProof="0" dirty="0">
+                <a:ln>
+                  <a:noFill/>
+                </a:ln>
+                <a:solidFill>
+                  <a:srgbClr val="1B2A4A"/>
+                </a:solidFill>
+                <a:effectLst/>
+                <a:uLnTx/>
+                <a:uFillTx/>
+                <a:latin typeface="Calibri" pitchFamily="34" charset="0"/>
+                <a:ea typeface="Calibri" pitchFamily="34" charset="-122"/>
+                <a:cs typeface="Calibri" pitchFamily="34" charset="-120"/>
+              </a:rPr>
+              <a:t>Tests using </a:t>
+            </a:r>
+            <a:r>
+              <a:rPr kumimoji="0" lang="en-US" sz="2200" b="1" i="0" u="none" strike="noStrike" kern="1200" cap="none" spc="0" normalizeH="0" baseline="0" noProof="0" dirty="0" err="1">
+                <a:ln>
+                  <a:noFill/>
+                </a:ln>
+                <a:solidFill>
+                  <a:srgbClr val="1B2A4A"/>
+                </a:solidFill>
+                <a:effectLst/>
+                <a:uLnTx/>
+                <a:uFillTx/>
+                <a:latin typeface="Calibri" pitchFamily="34" charset="0"/>
+                <a:ea typeface="Calibri" pitchFamily="34" charset="-122"/>
+                <a:cs typeface="Calibri" pitchFamily="34" charset="-120"/>
+              </a:rPr>
+              <a:t>test_printptable</a:t>
+            </a:r>
+            <a:endParaRPr kumimoji="0" lang="en-US" sz="2200" b="0" i="0" u="none" strike="noStrike" kern="1200" cap="none" spc="0" normalizeH="0" baseline="0" noProof="0" dirty="0">
+              <a:ln>
+                <a:noFill/>
+              </a:ln>
+              <a:solidFill>
+                <a:prstClr val="black"/>
+              </a:solidFill>
+              <a:effectLst/>
+              <a:uLnTx/>
+              <a:uFillTx/>
+              <a:latin typeface="Calibri" panose="020F0502020204030204"/>
+              <a:ea typeface="+mn-ea"/>
+              <a:cs typeface="+mn-cs"/>
+            </a:endParaRPr>
+          </a:p>
+        </p:txBody>
+      </p:sp>
+      <p:pic>
+        <p:nvPicPr>
+          <p:cNvPr id="7" name="Picture 6">
+            <a:extLst>
+              <a:ext uri="{FF2B5EF4-FFF2-40B4-BE49-F238E27FC236}">
+                <a16:creationId xmlns:a16="http://schemas.microsoft.com/office/drawing/2014/main" id="{BDB985CA-22B8-49D7-E96A-D1A2337393FD}"/>
+              </a:ext>
+            </a:extLst>
+          </p:cNvPr>
+          <p:cNvPicPr>
+            <a:picLocks noChangeAspect="1"/>
+          </p:cNvPicPr>
+          <p:nvPr/>
+        </p:nvPicPr>
+        <p:blipFill>
+          <a:blip r:embed="rId3"/>
+          <a:stretch>
+            <a:fillRect/>
+          </a:stretch>
+        </p:blipFill>
+        <p:spPr>
+          <a:xfrm>
+            <a:off x="6094602" y="51535"/>
+            <a:ext cx="2775948" cy="3106936"/>
+          </a:xfrm>
+          <a:prstGeom prst="rect">
+            <a:avLst/>
+          </a:prstGeom>
+        </p:spPr>
+      </p:pic>
+      <p:pic>
+        <p:nvPicPr>
+          <p:cNvPr id="9" name="Picture 8">
+            <a:extLst>
+              <a:ext uri="{FF2B5EF4-FFF2-40B4-BE49-F238E27FC236}">
+                <a16:creationId xmlns:a16="http://schemas.microsoft.com/office/drawing/2014/main" id="{1C365128-7C79-D86E-89A5-CDCB54E45FC1}"/>
+              </a:ext>
+            </a:extLst>
+          </p:cNvPr>
+          <p:cNvPicPr>
+            <a:picLocks noChangeAspect="1"/>
+          </p:cNvPicPr>
+          <p:nvPr/>
+        </p:nvPicPr>
+        <p:blipFill>
+          <a:blip r:embed="rId4"/>
+          <a:stretch>
+            <a:fillRect/>
+          </a:stretch>
+        </p:blipFill>
+        <p:spPr>
+          <a:xfrm>
+            <a:off x="5639341" y="2375132"/>
+            <a:ext cx="2735724" cy="2528233"/>
+          </a:xfrm>
+          <a:prstGeom prst="rect">
+            <a:avLst/>
+          </a:prstGeom>
+        </p:spPr>
+      </p:pic>
+      <p:sp>
+        <p:nvSpPr>
+          <p:cNvPr id="10" name="TextBox 9">
+            <a:extLst>
+              <a:ext uri="{FF2B5EF4-FFF2-40B4-BE49-F238E27FC236}">
+                <a16:creationId xmlns:a16="http://schemas.microsoft.com/office/drawing/2014/main" id="{C057E0D1-BB94-D5DD-A8AF-04F096D7A578}"/>
+              </a:ext>
+            </a:extLst>
+          </p:cNvPr>
+          <p:cNvSpPr txBox="1"/>
+          <p:nvPr/>
+        </p:nvSpPr>
+        <p:spPr>
+          <a:xfrm>
+            <a:off x="768965" y="763399"/>
+            <a:ext cx="1072922" cy="369332"/>
+          </a:xfrm>
+          <a:prstGeom prst="rect">
+            <a:avLst/>
+          </a:prstGeom>
+          <a:noFill/>
+        </p:spPr>
+        <p:txBody>
+          <a:bodyPr wrap="none" rtlCol="0">
+            <a:spAutoFit/>
+          </a:bodyPr>
+          <a:lstStyle/>
+          <a:p>
+            <a:r>
+              <a:rPr lang="en-US" dirty="0"/>
+              <a:t>No Decay</a:t>
+            </a:r>
+          </a:p>
+        </p:txBody>
+      </p:sp>
+      <p:sp>
+        <p:nvSpPr>
+          <p:cNvPr id="11" name="TextBox 10">
+            <a:extLst>
+              <a:ext uri="{FF2B5EF4-FFF2-40B4-BE49-F238E27FC236}">
+                <a16:creationId xmlns:a16="http://schemas.microsoft.com/office/drawing/2014/main" id="{903BE151-398B-F29D-DF4B-A25DF1AB2CDC}"/>
+              </a:ext>
+            </a:extLst>
+          </p:cNvPr>
+          <p:cNvSpPr txBox="1"/>
+          <p:nvPr/>
+        </p:nvSpPr>
+        <p:spPr>
+          <a:xfrm>
+            <a:off x="4853031" y="847288"/>
+            <a:ext cx="1258871" cy="369332"/>
+          </a:xfrm>
+          <a:prstGeom prst="rect">
+            <a:avLst/>
+          </a:prstGeom>
+          <a:noFill/>
+        </p:spPr>
+        <p:txBody>
+          <a:bodyPr wrap="none" rtlCol="0">
+            <a:spAutoFit/>
+          </a:bodyPr>
+          <a:lstStyle/>
+          <a:p>
+            <a:r>
+              <a:rPr lang="en-US" dirty="0"/>
+              <a:t>With Decay</a:t>
+            </a:r>
+          </a:p>
+        </p:txBody>
+      </p:sp>
+      <p:pic>
+        <p:nvPicPr>
+          <p:cNvPr id="13" name="Picture 12">
+            <a:extLst>
+              <a:ext uri="{FF2B5EF4-FFF2-40B4-BE49-F238E27FC236}">
+                <a16:creationId xmlns:a16="http://schemas.microsoft.com/office/drawing/2014/main" id="{01075C42-5249-3932-88BA-33E1F5BA61CC}"/>
+              </a:ext>
+            </a:extLst>
+          </p:cNvPr>
+          <p:cNvPicPr>
+            <a:picLocks noChangeAspect="1"/>
+          </p:cNvPicPr>
+          <p:nvPr/>
+        </p:nvPicPr>
+        <p:blipFill>
+          <a:blip r:embed="rId5"/>
+          <a:stretch>
+            <a:fillRect/>
+          </a:stretch>
+        </p:blipFill>
+        <p:spPr>
+          <a:xfrm>
+            <a:off x="486561" y="1132731"/>
+            <a:ext cx="3677345" cy="4109060"/>
+          </a:xfrm>
+          <a:prstGeom prst="rect">
+            <a:avLst/>
+          </a:prstGeom>
+        </p:spPr>
+      </p:pic>
+    </p:spTree>
+    <p:extLst>
+      <p:ext uri="{BB962C8B-B14F-4D97-AF65-F5344CB8AC3E}">
+        <p14:creationId xmlns:p14="http://schemas.microsoft.com/office/powerpoint/2010/main" val="3684437184"/>
+      </p:ext>
+    </p:extLst>
+  </p:cSld>
+  <p:clrMapOvr>
+    <a:masterClrMapping/>
+  </p:clrMapOvr>
+</p:sld>
+</file>
+
+<file path=ppt/slides/slide17.xml><?xml version="1.0" encoding="utf-8"?>
+<p:sld xmlns:a="http://schemas.openxmlformats.org/drawingml/2006/main" xmlns:r="http://schemas.openxmlformats.org/officeDocument/2006/relationships" xmlns:p="http://schemas.openxmlformats.org/presentationml/2006/main">
+  <p:cSld>
+    <p:bg>
+      <p:bgPr>
+        <a:solidFill>
+          <a:srgbClr val="FFFFFF"/>
+        </a:solidFill>
+        <a:effectLst/>
+      </p:bgPr>
+    </p:bg>
+    <p:spTree>
+      <p:nvGrpSpPr>
+        <p:cNvPr id="1" name="">
+          <a:extLst>
+            <a:ext uri="{FF2B5EF4-FFF2-40B4-BE49-F238E27FC236}">
+              <a16:creationId xmlns:a16="http://schemas.microsoft.com/office/drawing/2014/main" id="{1F9E5F54-B342-19C5-4AAD-B83051224D48}"/>
+            </a:ext>
+          </a:extLst>
+        </p:cNvPr>
+        <p:cNvGrpSpPr/>
+        <p:nvPr/>
+      </p:nvGrpSpPr>
+      <p:grpSpPr>
+        <a:xfrm>
+          <a:off x="0" y="0"/>
+          <a:ext cx="0" cy="0"/>
+          <a:chOff x="0" y="0"/>
+          <a:chExt cx="0" cy="0"/>
+        </a:xfrm>
+      </p:grpSpPr>
+      <p:sp>
+        <p:nvSpPr>
+          <p:cNvPr id="2" name="Shape 0">
+            <a:extLst>
+              <a:ext uri="{FF2B5EF4-FFF2-40B4-BE49-F238E27FC236}">
+                <a16:creationId xmlns:a16="http://schemas.microsoft.com/office/drawing/2014/main" id="{970FE23B-1299-15E8-FCB0-FE045143E95F}"/>
+              </a:ext>
+            </a:extLst>
+          </p:cNvPr>
+          <p:cNvSpPr/>
+          <p:nvPr/>
+        </p:nvSpPr>
+        <p:spPr>
+          <a:xfrm>
+            <a:off x="0" y="0"/>
+            <a:ext cx="164592" cy="5143500"/>
+          </a:xfrm>
+          <a:prstGeom prst="rect">
+            <a:avLst/>
+          </a:prstGeom>
+          <a:solidFill>
+            <a:srgbClr val="1B2A4A"/>
+          </a:solidFill>
+          <a:ln w="12700">
+            <a:solidFill>
+              <a:srgbClr val="1B2A4A"/>
+            </a:solidFill>
+            <a:prstDash val="solid"/>
+          </a:ln>
+        </p:spPr>
+        <p:txBody>
+          <a:bodyPr/>
+          <a:lstStyle/>
+          <a:p>
+            <a:pPr marL="0" marR="0" lvl="0" indent="0" algn="l" defTabSz="914400" rtl="0" eaLnBrk="1" fontAlgn="auto" latinLnBrk="0" hangingPunct="1">
+              <a:lnSpc>
+                <a:spcPct val="100000"/>
+              </a:lnSpc>
+              <a:spcBef>
+                <a:spcPts val="0"/>
+              </a:spcBef>
+              <a:spcAft>
+                <a:spcPts val="0"/>
+              </a:spcAft>
+              <a:buClrTx/>
+              <a:buSzTx/>
+              <a:buFontTx/>
+              <a:buNone/>
+              <a:tabLst/>
+              <a:defRPr/>
+            </a:pPr>
+            <a:endParaRPr kumimoji="0" lang="en-US" sz="1800" b="0" i="0" u="none" strike="noStrike" kern="1200" cap="none" spc="0" normalizeH="0" baseline="0" noProof="0">
+              <a:ln>
+                <a:noFill/>
+              </a:ln>
+              <a:solidFill>
+                <a:prstClr val="black"/>
+              </a:solidFill>
+              <a:effectLst/>
+              <a:uLnTx/>
+              <a:uFillTx/>
+              <a:latin typeface="Calibri" panose="020F0502020204030204"/>
+              <a:ea typeface="+mn-ea"/>
+              <a:cs typeface="+mn-cs"/>
+            </a:endParaRPr>
+          </a:p>
+        </p:txBody>
+      </p:sp>
+      <p:sp>
+        <p:nvSpPr>
+          <p:cNvPr id="3" name="Shape 1">
+            <a:extLst>
+              <a:ext uri="{FF2B5EF4-FFF2-40B4-BE49-F238E27FC236}">
+                <a16:creationId xmlns:a16="http://schemas.microsoft.com/office/drawing/2014/main" id="{DC3E70B5-2CB9-F334-2CFC-42979A988833}"/>
+              </a:ext>
+            </a:extLst>
+          </p:cNvPr>
+          <p:cNvSpPr/>
+          <p:nvPr/>
+        </p:nvSpPr>
+        <p:spPr>
+          <a:xfrm>
+            <a:off x="164592" y="0"/>
+            <a:ext cx="8979408" cy="713232"/>
+          </a:xfrm>
+          <a:prstGeom prst="rect">
+            <a:avLst/>
+          </a:prstGeom>
+          <a:solidFill>
+            <a:srgbClr val="F4F6FA"/>
+          </a:solidFill>
+          <a:ln w="12700">
+            <a:solidFill>
+              <a:srgbClr val="F4F6FA"/>
+            </a:solidFill>
+            <a:prstDash val="solid"/>
+          </a:ln>
+        </p:spPr>
+        <p:txBody>
+          <a:bodyPr/>
+          <a:lstStyle/>
+          <a:p>
+            <a:pPr marL="0" marR="0" lvl="0" indent="0" algn="l" defTabSz="914400" rtl="0" eaLnBrk="1" fontAlgn="auto" latinLnBrk="0" hangingPunct="1">
+              <a:lnSpc>
+                <a:spcPct val="100000"/>
+              </a:lnSpc>
+              <a:spcBef>
+                <a:spcPts val="0"/>
+              </a:spcBef>
+              <a:spcAft>
+                <a:spcPts val="0"/>
+              </a:spcAft>
+              <a:buClrTx/>
+              <a:buSzTx/>
+              <a:buFontTx/>
+              <a:buNone/>
+              <a:tabLst/>
+              <a:defRPr/>
+            </a:pPr>
+            <a:endParaRPr kumimoji="0" lang="en-US" sz="1800" b="0" i="0" u="none" strike="noStrike" kern="1200" cap="none" spc="0" normalizeH="0" baseline="0" noProof="0">
+              <a:ln>
+                <a:noFill/>
+              </a:ln>
+              <a:solidFill>
+                <a:prstClr val="black"/>
+              </a:solidFill>
+              <a:effectLst/>
+              <a:uLnTx/>
+              <a:uFillTx/>
+              <a:latin typeface="Calibri" panose="020F0502020204030204"/>
+              <a:ea typeface="+mn-ea"/>
+              <a:cs typeface="+mn-cs"/>
+            </a:endParaRPr>
+          </a:p>
+        </p:txBody>
+      </p:sp>
+      <p:sp>
+        <p:nvSpPr>
+          <p:cNvPr id="4" name="Text 2">
+            <a:extLst>
+              <a:ext uri="{FF2B5EF4-FFF2-40B4-BE49-F238E27FC236}">
+                <a16:creationId xmlns:a16="http://schemas.microsoft.com/office/drawing/2014/main" id="{1B81ED4F-5086-5C33-6E74-EB2EC7EE2DCE}"/>
+              </a:ext>
+            </a:extLst>
+          </p:cNvPr>
+          <p:cNvSpPr/>
+          <p:nvPr/>
+        </p:nvSpPr>
+        <p:spPr>
+          <a:xfrm>
+            <a:off x="347472" y="0"/>
+            <a:ext cx="8595360" cy="713232"/>
+          </a:xfrm>
+          <a:prstGeom prst="rect">
+            <a:avLst/>
+          </a:prstGeom>
+          <a:noFill/>
+          <a:ln/>
+        </p:spPr>
+        <p:txBody>
+          <a:bodyPr wrap="square" lIns="0" tIns="0" rIns="0" bIns="0" rtlCol="0" anchor="ctr"/>
+          <a:lstStyle/>
+          <a:p>
+            <a:pPr marL="0" marR="0" lvl="0" indent="0" algn="l" defTabSz="914400" rtl="0" eaLnBrk="1" fontAlgn="auto" latinLnBrk="0" hangingPunct="1">
+              <a:lnSpc>
+                <a:spcPct val="100000"/>
+              </a:lnSpc>
+              <a:spcBef>
+                <a:spcPts val="0"/>
+              </a:spcBef>
+              <a:spcAft>
+                <a:spcPts val="0"/>
+              </a:spcAft>
+              <a:buClrTx/>
+              <a:buSzTx/>
+              <a:buFontTx/>
+              <a:buNone/>
+              <a:tabLst/>
+              <a:defRPr/>
+            </a:pPr>
+            <a:r>
+              <a:rPr kumimoji="0" lang="en-US" sz="2200" b="1" i="0" u="none" strike="noStrike" kern="1200" cap="none" spc="0" normalizeH="0" baseline="0" noProof="0" dirty="0">
+                <a:ln>
+                  <a:noFill/>
+                </a:ln>
+                <a:solidFill>
+                  <a:srgbClr val="1B2A4A"/>
+                </a:solidFill>
+                <a:effectLst/>
+                <a:uLnTx/>
+                <a:uFillTx/>
+                <a:latin typeface="Calibri" pitchFamily="34" charset="0"/>
+                <a:ea typeface="Calibri" pitchFamily="34" charset="-122"/>
+                <a:cs typeface="Calibri" pitchFamily="34" charset="-120"/>
+              </a:rPr>
+              <a:t>Tests using </a:t>
+            </a:r>
+            <a:r>
+              <a:rPr kumimoji="0" lang="en-US" sz="2200" b="1" i="0" u="none" strike="noStrike" kern="1200" cap="none" spc="0" normalizeH="0" baseline="0" noProof="0" dirty="0" err="1">
+                <a:ln>
+                  <a:noFill/>
+                </a:ln>
+                <a:solidFill>
+                  <a:srgbClr val="1B2A4A"/>
+                </a:solidFill>
+                <a:effectLst/>
+                <a:uLnTx/>
+                <a:uFillTx/>
+                <a:latin typeface="Calibri" pitchFamily="34" charset="0"/>
+                <a:ea typeface="Calibri" pitchFamily="34" charset="-122"/>
+                <a:cs typeface="Calibri" pitchFamily="34" charset="-120"/>
+              </a:rPr>
+              <a:t>test_setpriority</a:t>
+            </a:r>
+            <a:endParaRPr kumimoji="0" lang="en-US" sz="2200" b="0" i="0" u="none" strike="noStrike" kern="1200" cap="none" spc="0" normalizeH="0" baseline="0" noProof="0" dirty="0">
+              <a:ln>
+                <a:noFill/>
+              </a:ln>
+              <a:solidFill>
+                <a:prstClr val="black"/>
+              </a:solidFill>
+              <a:effectLst/>
+              <a:uLnTx/>
+              <a:uFillTx/>
+              <a:latin typeface="Calibri" panose="020F0502020204030204"/>
+              <a:ea typeface="+mn-ea"/>
+              <a:cs typeface="+mn-cs"/>
+            </a:endParaRPr>
+          </a:p>
+        </p:txBody>
+      </p:sp>
+      <p:pic>
+        <p:nvPicPr>
+          <p:cNvPr id="7" name="Picture 6">
+            <a:extLst>
+              <a:ext uri="{FF2B5EF4-FFF2-40B4-BE49-F238E27FC236}">
+                <a16:creationId xmlns:a16="http://schemas.microsoft.com/office/drawing/2014/main" id="{8897312B-3E08-86E2-0B27-3B1E675B9195}"/>
+              </a:ext>
+            </a:extLst>
+          </p:cNvPr>
+          <p:cNvPicPr>
+            <a:picLocks noChangeAspect="1"/>
+          </p:cNvPicPr>
+          <p:nvPr/>
+        </p:nvPicPr>
+        <p:blipFill>
+          <a:blip r:embed="rId3"/>
+          <a:stretch>
+            <a:fillRect/>
+          </a:stretch>
+        </p:blipFill>
+        <p:spPr>
+          <a:xfrm>
+            <a:off x="2468789" y="1031846"/>
+            <a:ext cx="4371014" cy="3728906"/>
+          </a:xfrm>
+          <a:prstGeom prst="rect">
+            <a:avLst/>
+          </a:prstGeom>
+        </p:spPr>
+      </p:pic>
+    </p:spTree>
+    <p:extLst>
+      <p:ext uri="{BB962C8B-B14F-4D97-AF65-F5344CB8AC3E}">
+        <p14:creationId xmlns:p14="http://schemas.microsoft.com/office/powerpoint/2010/main" val="4049835082"/>
+      </p:ext>
+    </p:extLst>
+  </p:cSld>
+  <p:clrMapOvr>
+    <a:masterClrMapping/>
+  </p:clrMapOvr>
+</p:sld>
+</file>
+
+<file path=ppt/slides/slide18.xml><?xml version="1.0" encoding="utf-8"?>
+<p:sld xmlns:a="http://schemas.openxmlformats.org/drawingml/2006/main" xmlns:r="http://schemas.openxmlformats.org/officeDocument/2006/relationships" xmlns:p="http://schemas.openxmlformats.org/presentationml/2006/main">
   <p:cSld name="Slide 10">
     <p:bg>
       <p:bgPr>
@@ -2599,6 +7058,13 @@
             <a:prstDash val="solid"/>
           </a:ln>
         </p:spPr>
+        <p:txBody>
+          <a:bodyPr/>
+          <a:lstStyle/>
+          <a:p>
+            <a:endParaRPr lang="en-US"/>
+          </a:p>
+        </p:txBody>
       </p:sp>
       <p:sp>
         <p:nvSpPr>
@@ -2624,6 +7090,13 @@
             <a:prstDash val="solid"/>
           </a:ln>
         </p:spPr>
+        <p:txBody>
+          <a:bodyPr/>
+          <a:lstStyle/>
+          <a:p>
+            <a:endParaRPr lang="en-US"/>
+          </a:p>
+        </p:txBody>
       </p:sp>
       <p:sp>
         <p:nvSpPr>
@@ -2695,6 +7168,13 @@
             </a:outerShdw>
           </a:effectLst>
         </p:spPr>
+        <p:txBody>
+          <a:bodyPr/>
+          <a:lstStyle/>
+          <a:p>
+            <a:endParaRPr lang="en-US"/>
+          </a:p>
+        </p:txBody>
       </p:sp>
       <p:sp>
         <p:nvSpPr>
@@ -2720,6 +7200,13 @@
             <a:prstDash val="solid"/>
           </a:ln>
         </p:spPr>
+        <p:txBody>
+          <a:bodyPr/>
+          <a:lstStyle/>
+          <a:p>
+            <a:endParaRPr lang="en-US"/>
+          </a:p>
+        </p:txBody>
       </p:sp>
       <p:sp>
         <p:nvSpPr>
@@ -2909,6 +7396,13 @@
             </a:outerShdw>
           </a:effectLst>
         </p:spPr>
+        <p:txBody>
+          <a:bodyPr/>
+          <a:lstStyle/>
+          <a:p>
+            <a:endParaRPr lang="en-US" dirty="0"/>
+          </a:p>
+        </p:txBody>
       </p:sp>
       <p:sp>
         <p:nvSpPr>
@@ -2934,6 +7428,13 @@
             <a:prstDash val="solid"/>
           </a:ln>
         </p:spPr>
+        <p:txBody>
+          <a:bodyPr/>
+          <a:lstStyle/>
+          <a:p>
+            <a:endParaRPr lang="en-US"/>
+          </a:p>
+        </p:txBody>
       </p:sp>
       <p:sp>
         <p:nvSpPr>
@@ -3030,8 +7531,9 @@
             <a:endParaRPr lang="en-US" sz="1200" dirty="0"/>
           </a:p>
           <a:p>
-            <a:pPr marL="0" indent="0">
-              <a:buNone/>
+            <a:pPr marL="171450" indent="-171450">
+              <a:buFont typeface="Arial" panose="020B0604020202020204" pitchFamily="34" charset="0"/>
+              <a:buChar char="•"/>
             </a:pPr>
             <a:r>
               <a:rPr lang="en-US" sz="1200" dirty="0">
@@ -3042,9 +7544,42 @@
                 <a:ea typeface="Calibri" pitchFamily="34" charset="-122"/>
                 <a:cs typeface="Calibri" pitchFamily="34" charset="-120"/>
               </a:rPr>
-              <a:t>•</a:t>
-            </a:r>
-            <a:endParaRPr lang="en-US" sz="1200" dirty="0"/>
+              <a:t>Implemented the 2 schedulers</a:t>
+            </a:r>
+          </a:p>
+          <a:p>
+            <a:pPr marL="171450" indent="-171450">
+              <a:buFont typeface="Arial" panose="020B0604020202020204" pitchFamily="34" charset="0"/>
+              <a:buChar char="•"/>
+            </a:pPr>
+            <a:r>
+              <a:rPr lang="en-US" sz="1200" dirty="0">
+                <a:solidFill>
+                  <a:srgbClr val="374151"/>
+                </a:solidFill>
+                <a:latin typeface="Calibri" pitchFamily="34" charset="0"/>
+                <a:ea typeface="Calibri" pitchFamily="34" charset="-122"/>
+                <a:cs typeface="Calibri" pitchFamily="34" charset="-120"/>
+              </a:rPr>
+              <a:t>Tested the 2 schedulers</a:t>
+            </a:r>
+          </a:p>
+          <a:p>
+            <a:pPr marL="171450" indent="-171450">
+              <a:buFont typeface="Arial" panose="020B0604020202020204" pitchFamily="34" charset="0"/>
+              <a:buChar char="•"/>
+            </a:pPr>
+            <a:r>
+              <a:rPr lang="en-US" sz="1200" dirty="0">
+                <a:solidFill>
+                  <a:srgbClr val="374151"/>
+                </a:solidFill>
+                <a:latin typeface="Calibri" pitchFamily="34" charset="0"/>
+                <a:ea typeface="Calibri" pitchFamily="34" charset="-122"/>
+                <a:cs typeface="Calibri" pitchFamily="34" charset="-120"/>
+              </a:rPr>
+              <a:t>Did part 2 slides in the presentation</a:t>
+            </a:r>
           </a:p>
         </p:txBody>
       </p:sp>
@@ -3105,6 +7640,13 @@
             <a:prstDash val="solid"/>
           </a:ln>
         </p:spPr>
+        <p:txBody>
+          <a:bodyPr/>
+          <a:lstStyle/>
+          <a:p>
+            <a:endParaRPr lang="en-US"/>
+          </a:p>
+        </p:txBody>
       </p:sp>
       <p:sp>
         <p:nvSpPr>
@@ -3291,6 +7833,13 @@
             <a:prstDash val="solid"/>
           </a:ln>
         </p:spPr>
+        <p:txBody>
+          <a:bodyPr/>
+          <a:lstStyle/>
+          <a:p>
+            <a:endParaRPr lang="en-US"/>
+          </a:p>
+        </p:txBody>
       </p:sp>
       <p:sp>
         <p:nvSpPr>
@@ -3316,6 +7865,13 @@
             <a:prstDash val="solid"/>
           </a:ln>
         </p:spPr>
+        <p:txBody>
+          <a:bodyPr/>
+          <a:lstStyle/>
+          <a:p>
+            <a:endParaRPr lang="en-US"/>
+          </a:p>
+        </p:txBody>
       </p:sp>
       <p:sp>
         <p:nvSpPr>
@@ -6205,6 +10761,13 @@
             <a:prstDash val="solid"/>
           </a:ln>
         </p:spPr>
+        <p:txBody>
+          <a:bodyPr/>
+          <a:lstStyle/>
+          <a:p>
+            <a:endParaRPr lang="en-US"/>
+          </a:p>
+        </p:txBody>
       </p:sp>
       <p:sp>
         <p:nvSpPr>
@@ -6230,6 +10793,13 @@
             <a:prstDash val="solid"/>
           </a:ln>
         </p:spPr>
+        <p:txBody>
+          <a:bodyPr/>
+          <a:lstStyle/>
+          <a:p>
+            <a:endParaRPr lang="en-US"/>
+          </a:p>
+        </p:txBody>
       </p:sp>
       <p:sp>
         <p:nvSpPr>
@@ -6301,6 +10871,13 @@
             </a:outerShdw>
           </a:effectLst>
         </p:spPr>
+        <p:txBody>
+          <a:bodyPr/>
+          <a:lstStyle/>
+          <a:p>
+            <a:endParaRPr lang="en-US"/>
+          </a:p>
+        </p:txBody>
       </p:sp>
       <p:sp>
         <p:nvSpPr>
@@ -6326,6 +10903,13 @@
             <a:prstDash val="solid"/>
           </a:ln>
         </p:spPr>
+        <p:txBody>
+          <a:bodyPr/>
+          <a:lstStyle/>
+          <a:p>
+            <a:endParaRPr lang="en-US"/>
+          </a:p>
+        </p:txBody>
       </p:sp>
       <p:sp>
         <p:nvSpPr>
@@ -6492,6 +11076,13 @@
             </a:outerShdw>
           </a:effectLst>
         </p:spPr>
+        <p:txBody>
+          <a:bodyPr/>
+          <a:lstStyle/>
+          <a:p>
+            <a:endParaRPr lang="en-US"/>
+          </a:p>
+        </p:txBody>
       </p:sp>
       <p:sp>
         <p:nvSpPr>
@@ -6517,6 +11108,13 @@
             <a:prstDash val="solid"/>
           </a:ln>
         </p:spPr>
+        <p:txBody>
+          <a:bodyPr/>
+          <a:lstStyle/>
+          <a:p>
+            <a:endParaRPr lang="en-US"/>
+          </a:p>
+        </p:txBody>
       </p:sp>
       <p:sp>
         <p:nvSpPr>
@@ -6683,6 +11281,13 @@
             </a:outerShdw>
           </a:effectLst>
         </p:spPr>
+        <p:txBody>
+          <a:bodyPr/>
+          <a:lstStyle/>
+          <a:p>
+            <a:endParaRPr lang="en-US"/>
+          </a:p>
+        </p:txBody>
       </p:sp>
       <p:sp>
         <p:nvSpPr>
@@ -6708,6 +11313,13 @@
             <a:prstDash val="solid"/>
           </a:ln>
         </p:spPr>
+        <p:txBody>
+          <a:bodyPr/>
+          <a:lstStyle/>
+          <a:p>
+            <a:endParaRPr lang="en-US"/>
+          </a:p>
+        </p:txBody>
       </p:sp>
       <p:sp>
         <p:nvSpPr>
@@ -6865,6 +11477,13 @@
             <a:prstDash val="solid"/>
           </a:ln>
         </p:spPr>
+        <p:txBody>
+          <a:bodyPr/>
+          <a:lstStyle/>
+          <a:p>
+            <a:endParaRPr lang="en-US"/>
+          </a:p>
+        </p:txBody>
       </p:sp>
       <p:sp>
         <p:nvSpPr>
@@ -6929,6 +11548,13 @@
             <a:prstDash val="solid"/>
           </a:ln>
         </p:spPr>
+        <p:txBody>
+          <a:bodyPr/>
+          <a:lstStyle/>
+          <a:p>
+            <a:endParaRPr lang="en-US"/>
+          </a:p>
+        </p:txBody>
       </p:sp>
       <p:sp>
         <p:nvSpPr>
@@ -7037,6 +11663,13 @@
             <a:prstDash val="solid"/>
           </a:ln>
         </p:spPr>
+        <p:txBody>
+          <a:bodyPr/>
+          <a:lstStyle/>
+          <a:p>
+            <a:endParaRPr lang="en-US"/>
+          </a:p>
+        </p:txBody>
       </p:sp>
       <p:sp>
         <p:nvSpPr>
@@ -7062,6 +11695,13 @@
             <a:prstDash val="solid"/>
           </a:ln>
         </p:spPr>
+        <p:txBody>
+          <a:bodyPr/>
+          <a:lstStyle/>
+          <a:p>
+            <a:endParaRPr lang="en-US"/>
+          </a:p>
+        </p:txBody>
       </p:sp>
       <p:sp>
         <p:nvSpPr>
@@ -7133,6 +11773,13 @@
             </a:outerShdw>
           </a:effectLst>
         </p:spPr>
+        <p:txBody>
+          <a:bodyPr/>
+          <a:lstStyle/>
+          <a:p>
+            <a:endParaRPr lang="en-US"/>
+          </a:p>
+        </p:txBody>
       </p:sp>
       <p:sp>
         <p:nvSpPr>
@@ -7251,6 +11898,13 @@
             <a:prstDash val="solid"/>
           </a:ln>
         </p:spPr>
+        <p:txBody>
+          <a:bodyPr/>
+          <a:lstStyle/>
+          <a:p>
+            <a:endParaRPr lang="en-US"/>
+          </a:p>
+        </p:txBody>
       </p:sp>
       <p:sp>
         <p:nvSpPr>
@@ -7283,6 +11937,13 @@
             </a:outerShdw>
           </a:effectLst>
         </p:spPr>
+        <p:txBody>
+          <a:bodyPr/>
+          <a:lstStyle/>
+          <a:p>
+            <a:endParaRPr lang="en-US"/>
+          </a:p>
+        </p:txBody>
       </p:sp>
       <p:sp>
         <p:nvSpPr>
@@ -7401,6 +12062,13 @@
             <a:prstDash val="solid"/>
           </a:ln>
         </p:spPr>
+        <p:txBody>
+          <a:bodyPr/>
+          <a:lstStyle/>
+          <a:p>
+            <a:endParaRPr lang="en-US"/>
+          </a:p>
+        </p:txBody>
       </p:sp>
       <p:sp>
         <p:nvSpPr>
@@ -7433,6 +12101,13 @@
             </a:outerShdw>
           </a:effectLst>
         </p:spPr>
+        <p:txBody>
+          <a:bodyPr/>
+          <a:lstStyle/>
+          <a:p>
+            <a:endParaRPr lang="en-US"/>
+          </a:p>
+        </p:txBody>
       </p:sp>
       <p:sp>
         <p:nvSpPr>
@@ -7551,6 +12226,13 @@
             <a:prstDash val="solid"/>
           </a:ln>
         </p:spPr>
+        <p:txBody>
+          <a:bodyPr/>
+          <a:lstStyle/>
+          <a:p>
+            <a:endParaRPr lang="en-US"/>
+          </a:p>
+        </p:txBody>
       </p:sp>
       <p:sp>
         <p:nvSpPr>
@@ -7583,6 +12265,13 @@
             </a:outerShdw>
           </a:effectLst>
         </p:spPr>
+        <p:txBody>
+          <a:bodyPr/>
+          <a:lstStyle/>
+          <a:p>
+            <a:endParaRPr lang="en-US"/>
+          </a:p>
+        </p:txBody>
       </p:sp>
       <p:sp>
         <p:nvSpPr>
@@ -7701,6 +12390,13 @@
             <a:prstDash val="solid"/>
           </a:ln>
         </p:spPr>
+        <p:txBody>
+          <a:bodyPr/>
+          <a:lstStyle/>
+          <a:p>
+            <a:endParaRPr lang="en-US"/>
+          </a:p>
+        </p:txBody>
       </p:sp>
       <p:sp>
         <p:nvSpPr>
@@ -7733,6 +12429,13 @@
             </a:outerShdw>
           </a:effectLst>
         </p:spPr>
+        <p:txBody>
+          <a:bodyPr/>
+          <a:lstStyle/>
+          <a:p>
+            <a:endParaRPr lang="en-US"/>
+          </a:p>
+        </p:txBody>
       </p:sp>
       <p:sp>
         <p:nvSpPr>
@@ -7860,6 +12563,13 @@
             </a:outerShdw>
           </a:effectLst>
         </p:spPr>
+        <p:txBody>
+          <a:bodyPr/>
+          <a:lstStyle/>
+          <a:p>
+            <a:endParaRPr lang="en-US"/>
+          </a:p>
+        </p:txBody>
       </p:sp>
       <p:sp>
         <p:nvSpPr>
@@ -8154,6 +12864,13 @@
             <a:prstDash val="solid"/>
           </a:ln>
         </p:spPr>
+        <p:txBody>
+          <a:bodyPr/>
+          <a:lstStyle/>
+          <a:p>
+            <a:endParaRPr lang="en-US"/>
+          </a:p>
+        </p:txBody>
       </p:sp>
       <p:sp>
         <p:nvSpPr>
@@ -8179,6 +12896,13 @@
             <a:prstDash val="solid"/>
           </a:ln>
         </p:spPr>
+        <p:txBody>
+          <a:bodyPr/>
+          <a:lstStyle/>
+          <a:p>
+            <a:endParaRPr lang="en-US"/>
+          </a:p>
+        </p:txBody>
       </p:sp>
       <p:sp>
         <p:nvSpPr>
@@ -8250,6 +12974,13 @@
             </a:outerShdw>
           </a:effectLst>
         </p:spPr>
+        <p:txBody>
+          <a:bodyPr/>
+          <a:lstStyle/>
+          <a:p>
+            <a:endParaRPr lang="en-US"/>
+          </a:p>
+        </p:txBody>
       </p:sp>
       <p:sp>
         <p:nvSpPr>
@@ -8838,6 +13569,13 @@
             <a:prstDash val="solid"/>
           </a:ln>
         </p:spPr>
+        <p:txBody>
+          <a:bodyPr/>
+          <a:lstStyle/>
+          <a:p>
+            <a:endParaRPr lang="en-US"/>
+          </a:p>
+        </p:txBody>
       </p:sp>
       <p:sp>
         <p:nvSpPr>
@@ -8863,6 +13601,13 @@
             <a:prstDash val="solid"/>
           </a:ln>
         </p:spPr>
+        <p:txBody>
+          <a:bodyPr/>
+          <a:lstStyle/>
+          <a:p>
+            <a:endParaRPr lang="en-US"/>
+          </a:p>
+        </p:txBody>
       </p:sp>
       <p:sp>
         <p:nvSpPr>
@@ -8934,6 +13679,13 @@
             </a:outerShdw>
           </a:effectLst>
         </p:spPr>
+        <p:txBody>
+          <a:bodyPr/>
+          <a:lstStyle/>
+          <a:p>
+            <a:endParaRPr lang="en-US"/>
+          </a:p>
+        </p:txBody>
       </p:sp>
       <p:sp>
         <p:nvSpPr>
@@ -9349,6 +14101,13 @@
             <a:prstDash val="solid"/>
           </a:ln>
         </p:spPr>
+        <p:txBody>
+          <a:bodyPr/>
+          <a:lstStyle/>
+          <a:p>
+            <a:endParaRPr lang="en-US"/>
+          </a:p>
+        </p:txBody>
       </p:sp>
       <p:sp>
         <p:nvSpPr>
@@ -9374,6 +14133,13 @@
             <a:prstDash val="solid"/>
           </a:ln>
         </p:spPr>
+        <p:txBody>
+          <a:bodyPr/>
+          <a:lstStyle/>
+          <a:p>
+            <a:endParaRPr lang="en-US"/>
+          </a:p>
+        </p:txBody>
       </p:sp>
       <p:sp>
         <p:nvSpPr>
@@ -9445,6 +14211,13 @@
             </a:outerShdw>
           </a:effectLst>
         </p:spPr>
+        <p:txBody>
+          <a:bodyPr/>
+          <a:lstStyle/>
+          <a:p>
+            <a:endParaRPr lang="en-US"/>
+          </a:p>
+        </p:txBody>
       </p:sp>
       <p:sp>
         <p:nvSpPr>
@@ -9470,6 +14243,13 @@
             <a:prstDash val="solid"/>
           </a:ln>
         </p:spPr>
+        <p:txBody>
+          <a:bodyPr/>
+          <a:lstStyle/>
+          <a:p>
+            <a:endParaRPr lang="en-US"/>
+          </a:p>
+        </p:txBody>
       </p:sp>
       <p:sp>
         <p:nvSpPr>
@@ -9772,6 +14552,13 @@
             </a:outerShdw>
           </a:effectLst>
         </p:spPr>
+        <p:txBody>
+          <a:bodyPr/>
+          <a:lstStyle/>
+          <a:p>
+            <a:endParaRPr lang="en-US"/>
+          </a:p>
+        </p:txBody>
       </p:sp>
       <p:sp>
         <p:nvSpPr>
@@ -9797,6 +14584,13 @@
             <a:prstDash val="solid"/>
           </a:ln>
         </p:spPr>
+        <p:txBody>
+          <a:bodyPr/>
+          <a:lstStyle/>
+          <a:p>
+            <a:endParaRPr lang="en-US"/>
+          </a:p>
+        </p:txBody>
       </p:sp>
       <p:sp>
         <p:nvSpPr>
